--- a/Training Materials/8. PostgreSQL/1. Querying Data from PostgreSQL/Slides/6. Presenting and Aggregating Your Result/presenting-and-aggregating-your-results-slides.pptx
+++ b/Training Materials/8. PostgreSQL/1. Querying Data from PostgreSQL/Slides/6. Presenting and Aggregating Your Result/presenting-and-aggregating-your-results-slides.pptx
@@ -231,7 +231,7 @@
           <a:p>
             <a:fld id="{3EFD42F7-718C-4B98-AAEC-167E6DDD60A7}" type="datetimeFigureOut">
               <a:rPr lang="en-US" smtClean="0"/>
-              <a:t>11/19/2024</a:t>
+              <a:t>1/6/2026</a:t>
             </a:fld>
             <a:endParaRPr lang="en-US"/>
           </a:p>
@@ -666,7 +666,7 @@
           <a:p>
             <a:fld id="{1D8BD707-D9CF-40AE-B4C6-C98DA3205C09}" type="datetimeFigureOut">
               <a:rPr lang="en-US"/>
-              <a:t>11/19/2024</a:t>
+              <a:t>1/6/2026</a:t>
             </a:fld>
             <a:endParaRPr lang="en-US"/>
           </a:p>
@@ -843,7 +843,7 @@
           <a:p>
             <a:fld id="{1D8BD707-D9CF-40AE-B4C6-C98DA3205C09}" type="datetimeFigureOut">
               <a:rPr lang="en-US"/>
-              <a:t>11/19/2024</a:t>
+              <a:t>1/6/2026</a:t>
             </a:fld>
             <a:endParaRPr lang="en-US"/>
           </a:p>
@@ -1059,7 +1059,7 @@
           <a:p>
             <a:fld id="{1D8BD707-D9CF-40AE-B4C6-C98DA3205C09}" type="datetimeFigureOut">
               <a:rPr lang="en-US"/>
-              <a:t>11/19/2024</a:t>
+              <a:t>1/6/2026</a:t>
             </a:fld>
             <a:endParaRPr lang="en-US"/>
           </a:p>
@@ -1209,7 +1209,7 @@
           <a:p>
             <a:fld id="{1D8BD707-D9CF-40AE-B4C6-C98DA3205C09}" type="datetimeFigureOut">
               <a:rPr lang="en-US"/>
-              <a:t>11/19/2024</a:t>
+              <a:t>1/6/2026</a:t>
             </a:fld>
             <a:endParaRPr lang="en-US"/>
           </a:p>
@@ -1388,7 +1388,7 @@
           <a:p>
             <a:fld id="{1D8BD707-D9CF-40AE-B4C6-C98DA3205C09}" type="datetimeFigureOut">
               <a:rPr lang="en-US"/>
-              <a:t>11/19/2024</a:t>
+              <a:t>1/6/2026</a:t>
             </a:fld>
             <a:endParaRPr lang="en-US"/>
           </a:p>
@@ -1613,7 +1613,7 @@
           <a:p>
             <a:fld id="{1D8BD707-D9CF-40AE-B4C6-C98DA3205C09}" type="datetimeFigureOut">
               <a:rPr lang="en-US"/>
-              <a:t>11/19/2024</a:t>
+              <a:t>1/6/2026</a:t>
             </a:fld>
             <a:endParaRPr lang="en-US"/>
           </a:p>
@@ -14094,7 +14094,7 @@
                 </a:solidFill>
                 <a:latin typeface="Verdana" panose="020B0604030504040204"/>
               </a:rPr>
-              <a:t>**Avoid SELECT ***</a:t>
+              <a:t>**Avoid SELECT *</a:t>
             </a:r>
             <a:endParaRPr lang="en-US" sz="2000" spc="5" dirty="0">
               <a:solidFill>
@@ -14304,21 +14304,6 @@
               </a:rPr>
               <a:t>Easier to maintain and optimize.</a:t>
             </a:r>
-            <a:r>
-              <a:rPr lang="en-IN" sz="2000" spc="30" dirty="0">
-                <a:solidFill>
-                  <a:srgbClr val="2A9FBB"/>
-                </a:solidFill>
-                <a:latin typeface="Verdana" panose="020B0604030504040204"/>
-              </a:rPr>
-              <a:t>.</a:t>
-            </a:r>
-            <a:endParaRPr lang="en-US" sz="2000" spc="30" dirty="0">
-              <a:solidFill>
-                <a:srgbClr val="2A9FBB"/>
-              </a:solidFill>
-              <a:latin typeface="Verdana" panose="020B0604030504040204"/>
-            </a:endParaRPr>
           </a:p>
         </p:txBody>
       </p:sp>

--- a/Training Materials/8. PostgreSQL/1. Querying Data from PostgreSQL/Slides/6. Presenting and Aggregating Your Result/presenting-and-aggregating-your-results-slides.pptx
+++ b/Training Materials/8. PostgreSQL/1. Querying Data from PostgreSQL/Slides/6. Presenting and Aggregating Your Result/presenting-and-aggregating-your-results-slides.pptx
@@ -5,7 +5,7 @@
     <p:sldMasterId id="2147483648" r:id="rId1"/>
   </p:sldMasterIdLst>
   <p:notesMasterIdLst>
-    <p:notesMasterId r:id="rId29"/>
+    <p:notesMasterId r:id="rId36"/>
   </p:notesMasterIdLst>
   <p:sldIdLst>
     <p:sldId id="256" r:id="rId2"/>
@@ -34,7 +34,14 @@
     <p:sldId id="280" r:id="rId25"/>
     <p:sldId id="281" r:id="rId26"/>
     <p:sldId id="282" r:id="rId27"/>
-    <p:sldId id="273" r:id="rId28"/>
+    <p:sldId id="283" r:id="rId28"/>
+    <p:sldId id="284" r:id="rId29"/>
+    <p:sldId id="285" r:id="rId30"/>
+    <p:sldId id="286" r:id="rId31"/>
+    <p:sldId id="287" r:id="rId32"/>
+    <p:sldId id="288" r:id="rId33"/>
+    <p:sldId id="289" r:id="rId34"/>
+    <p:sldId id="273" r:id="rId35"/>
   </p:sldIdLst>
   <p:sldSz cx="12192000" cy="6858000"/>
   <p:notesSz cx="12192000" cy="6858000"/>
@@ -17554,6 +17561,684 @@
   <p:cSld>
     <p:spTree>
       <p:nvGrpSpPr>
+        <p:cNvPr id="1" name="">
+          <a:extLst>
+            <a:ext uri="{FF2B5EF4-FFF2-40B4-BE49-F238E27FC236}">
+              <a16:creationId xmlns:a16="http://schemas.microsoft.com/office/drawing/2014/main" id="{3E3C71D3-5842-2F55-7282-AB7F63103F54}"/>
+            </a:ext>
+          </a:extLst>
+        </p:cNvPr>
+        <p:cNvGrpSpPr/>
+        <p:nvPr/>
+      </p:nvGrpSpPr>
+      <p:grpSpPr>
+        <a:xfrm>
+          <a:off x="0" y="0"/>
+          <a:ext cx="0" cy="0"/>
+          <a:chOff x="0" y="0"/>
+          <a:chExt cx="0" cy="0"/>
+        </a:xfrm>
+      </p:grpSpPr>
+      <p:sp>
+        <p:nvSpPr>
+          <p:cNvPr id="2" name="object 2">
+            <a:extLst>
+              <a:ext uri="{FF2B5EF4-FFF2-40B4-BE49-F238E27FC236}">
+                <a16:creationId xmlns:a16="http://schemas.microsoft.com/office/drawing/2014/main" id="{5E374F9E-6332-C2FE-F3C5-A898E9C1E1A3}"/>
+              </a:ext>
+            </a:extLst>
+          </p:cNvPr>
+          <p:cNvSpPr/>
+          <p:nvPr/>
+        </p:nvSpPr>
+        <p:spPr>
+          <a:xfrm>
+            <a:off x="6096380" y="1762886"/>
+            <a:ext cx="0" cy="4645660"/>
+          </a:xfrm>
+          <a:custGeom>
+            <a:avLst/>
+            <a:gdLst/>
+            <a:ahLst/>
+            <a:cxnLst/>
+            <a:rect l="l" t="t" r="r" b="b"/>
+            <a:pathLst>
+              <a:path h="4645660">
+                <a:moveTo>
+                  <a:pt x="0" y="0"/>
+                </a:moveTo>
+                <a:lnTo>
+                  <a:pt x="0" y="4645482"/>
+                </a:lnTo>
+              </a:path>
+            </a:pathLst>
+          </a:custGeom>
+          <a:ln w="25146">
+            <a:solidFill>
+              <a:srgbClr val="EF5A28"/>
+            </a:solidFill>
+          </a:ln>
+        </p:spPr>
+        <p:txBody>
+          <a:bodyPr wrap="square" lIns="0" tIns="0" rIns="0" bIns="0" rtlCol="0"/>
+          <a:lstStyle/>
+          <a:p>
+            <a:endParaRPr/>
+          </a:p>
+        </p:txBody>
+      </p:sp>
+      <p:sp>
+        <p:nvSpPr>
+          <p:cNvPr id="3" name="object 3">
+            <a:extLst>
+              <a:ext uri="{FF2B5EF4-FFF2-40B4-BE49-F238E27FC236}">
+                <a16:creationId xmlns:a16="http://schemas.microsoft.com/office/drawing/2014/main" id="{602863EC-3E35-D145-C705-82CB3183CE14}"/>
+              </a:ext>
+            </a:extLst>
+          </p:cNvPr>
+          <p:cNvSpPr txBox="1"/>
+          <p:nvPr/>
+        </p:nvSpPr>
+        <p:spPr>
+          <a:xfrm>
+            <a:off x="151714" y="1017810"/>
+            <a:ext cx="5469762" cy="1490152"/>
+          </a:xfrm>
+          <a:prstGeom prst="rect">
+            <a:avLst/>
+          </a:prstGeom>
+        </p:spPr>
+        <p:txBody>
+          <a:bodyPr vert="horz" wrap="square" lIns="0" tIns="12700" rIns="0" bIns="0" rtlCol="0">
+            <a:spAutoFit/>
+          </a:bodyPr>
+          <a:lstStyle/>
+          <a:p>
+            <a:pPr marL="12700" algn="ctr">
+              <a:lnSpc>
+                <a:spcPct val="100000"/>
+              </a:lnSpc>
+              <a:spcBef>
+                <a:spcPts val="100"/>
+              </a:spcBef>
+            </a:pPr>
+            <a:r>
+              <a:rPr lang="en-US" sz="2400" spc="5" dirty="0">
+                <a:solidFill>
+                  <a:srgbClr val="EF5A28"/>
+                </a:solidFill>
+                <a:latin typeface="Verdana" panose="020B0604030504040204"/>
+              </a:rPr>
+              <a:t>A window function performs a calculation across a set of rows (the "window") that are related to the current row.</a:t>
+            </a:r>
+            <a:endParaRPr sz="2400" spc="5" dirty="0">
+              <a:solidFill>
+                <a:srgbClr val="EF5A28"/>
+              </a:solidFill>
+              <a:latin typeface="Verdana" panose="020B0604030504040204"/>
+            </a:endParaRPr>
+          </a:p>
+        </p:txBody>
+      </p:sp>
+      <p:sp>
+        <p:nvSpPr>
+          <p:cNvPr id="5" name="object 5">
+            <a:extLst>
+              <a:ext uri="{FF2B5EF4-FFF2-40B4-BE49-F238E27FC236}">
+                <a16:creationId xmlns:a16="http://schemas.microsoft.com/office/drawing/2014/main" id="{281C8DFA-8151-D712-75BD-54BEB91E2DDA}"/>
+              </a:ext>
+            </a:extLst>
+          </p:cNvPr>
+          <p:cNvSpPr txBox="1"/>
+          <p:nvPr/>
+        </p:nvSpPr>
+        <p:spPr>
+          <a:xfrm>
+            <a:off x="6348257" y="1183235"/>
+            <a:ext cx="5691343" cy="1921039"/>
+          </a:xfrm>
+          <a:prstGeom prst="rect">
+            <a:avLst/>
+          </a:prstGeom>
+        </p:spPr>
+        <p:txBody>
+          <a:bodyPr vert="horz" wrap="square" lIns="0" tIns="12700" rIns="0" bIns="0" rtlCol="0">
+            <a:spAutoFit/>
+          </a:bodyPr>
+          <a:lstStyle/>
+          <a:p>
+            <a:r>
+              <a:rPr lang="en-US" sz="2400" spc="30" dirty="0">
+                <a:solidFill>
+                  <a:srgbClr val="2A9FBB"/>
+                </a:solidFill>
+                <a:latin typeface="Verdana" panose="020B0604030504040204"/>
+              </a:rPr>
+              <a:t>Key Difference vs. GROUP BY:</a:t>
+            </a:r>
+          </a:p>
+          <a:p>
+            <a:r>
+              <a:rPr lang="en-US" sz="2000" spc="30" dirty="0">
+                <a:solidFill>
+                  <a:srgbClr val="2A9FBB"/>
+                </a:solidFill>
+                <a:latin typeface="Verdana" panose="020B0604030504040204"/>
+              </a:rPr>
+              <a:t>GROUP BY: Collapses multiple rows into a single result row.</a:t>
+            </a:r>
+          </a:p>
+          <a:p>
+            <a:r>
+              <a:rPr lang="en-US" sz="2000" spc="30" dirty="0">
+                <a:solidFill>
+                  <a:srgbClr val="2A9FBB"/>
+                </a:solidFill>
+                <a:latin typeface="Verdana" panose="020B0604030504040204"/>
+              </a:rPr>
+              <a:t>Window Function: Retains the identity of individual rows while appending the result of the calculation to each row.</a:t>
+            </a:r>
+          </a:p>
+        </p:txBody>
+      </p:sp>
+      <p:sp>
+        <p:nvSpPr>
+          <p:cNvPr id="7" name="object 7">
+            <a:extLst>
+              <a:ext uri="{FF2B5EF4-FFF2-40B4-BE49-F238E27FC236}">
+                <a16:creationId xmlns:a16="http://schemas.microsoft.com/office/drawing/2014/main" id="{A72A8283-68E0-016E-7510-785291094AFC}"/>
+              </a:ext>
+            </a:extLst>
+          </p:cNvPr>
+          <p:cNvSpPr txBox="1">
+            <a:spLocks noGrp="1"/>
+          </p:cNvSpPr>
+          <p:nvPr>
+            <p:ph type="title"/>
+          </p:nvPr>
+        </p:nvSpPr>
+        <p:spPr>
+          <a:xfrm>
+            <a:off x="1690164" y="137160"/>
+            <a:ext cx="9892236" cy="566822"/>
+          </a:xfrm>
+          <a:prstGeom prst="rect">
+            <a:avLst/>
+          </a:prstGeom>
+        </p:spPr>
+        <p:txBody>
+          <a:bodyPr vert="horz" wrap="square" lIns="0" tIns="12700" rIns="0" bIns="0" rtlCol="0">
+            <a:spAutoFit/>
+          </a:bodyPr>
+          <a:lstStyle/>
+          <a:p>
+            <a:pPr marL="12700" algn="ctr">
+              <a:lnSpc>
+                <a:spcPct val="100000"/>
+              </a:lnSpc>
+              <a:spcBef>
+                <a:spcPts val="100"/>
+              </a:spcBef>
+            </a:pPr>
+            <a:r>
+              <a:rPr lang="en-IN" dirty="0">
+                <a:solidFill>
+                  <a:schemeClr val="tx1"/>
+                </a:solidFill>
+              </a:rPr>
+              <a:t>Introduction to Window Functions</a:t>
+            </a:r>
+            <a:endParaRPr spc="25" dirty="0">
+              <a:solidFill>
+                <a:schemeClr val="tx1"/>
+              </a:solidFill>
+            </a:endParaRPr>
+          </a:p>
+        </p:txBody>
+      </p:sp>
+      <p:sp>
+        <p:nvSpPr>
+          <p:cNvPr id="9" name="Slide Number Placeholder 8">
+            <a:extLst>
+              <a:ext uri="{FF2B5EF4-FFF2-40B4-BE49-F238E27FC236}">
+                <a16:creationId xmlns:a16="http://schemas.microsoft.com/office/drawing/2014/main" id="{95787918-A854-A2D7-ED36-415E185B19C6}"/>
+              </a:ext>
+            </a:extLst>
+          </p:cNvPr>
+          <p:cNvSpPr>
+            <a:spLocks noGrp="1"/>
+          </p:cNvSpPr>
+          <p:nvPr>
+            <p:ph type="sldNum" sz="quarter" idx="7"/>
+          </p:nvPr>
+        </p:nvSpPr>
+        <p:spPr/>
+        <p:txBody>
+          <a:bodyPr/>
+          <a:lstStyle/>
+          <a:p>
+            <a:fld id="{B6F15528-21DE-4FAA-801E-634DDDAF4B2B}" type="slidenum">
+              <a:rPr/>
+              <a:t>27</a:t>
+            </a:fld>
+            <a:endParaRPr/>
+          </a:p>
+        </p:txBody>
+      </p:sp>
+      <p:sp>
+        <p:nvSpPr>
+          <p:cNvPr id="8" name="object 8">
+            <a:extLst>
+              <a:ext uri="{FF2B5EF4-FFF2-40B4-BE49-F238E27FC236}">
+                <a16:creationId xmlns:a16="http://schemas.microsoft.com/office/drawing/2014/main" id="{54A38BBA-3774-9C29-0964-6ACA756A2D84}"/>
+              </a:ext>
+            </a:extLst>
+          </p:cNvPr>
+          <p:cNvSpPr txBox="1"/>
+          <p:nvPr/>
+        </p:nvSpPr>
+        <p:spPr>
+          <a:xfrm>
+            <a:off x="-1249" y="2680099"/>
+            <a:ext cx="5898519" cy="4171655"/>
+          </a:xfrm>
+          <a:prstGeom prst="rect">
+            <a:avLst/>
+          </a:prstGeom>
+          <a:solidFill>
+            <a:srgbClr val="EF5A28"/>
+          </a:solidFill>
+        </p:spPr>
+        <p:txBody>
+          <a:bodyPr vert="horz" wrap="square" lIns="0" tIns="234950" rIns="0" bIns="0" rtlCol="0">
+            <a:spAutoFit/>
+          </a:bodyPr>
+          <a:lstStyle/>
+          <a:p>
+            <a:pPr marL="322580" marR="314325" indent="-1905">
+              <a:spcBef>
+                <a:spcPts val="1850"/>
+              </a:spcBef>
+            </a:pPr>
+            <a:r>
+              <a:rPr lang="en-US" sz="2400" b="1" dirty="0"/>
+              <a:t>Components of the OVER Clause: </a:t>
+            </a:r>
+            <a:r>
+              <a:rPr lang="en-US" sz="2000" b="1" i="1" dirty="0"/>
+              <a:t>PARTITION BY: Divides the result set into groups (partitions). The function is applied to each partition separately. If omitted, the entire result set is treated as one partition.</a:t>
+            </a:r>
+          </a:p>
+          <a:p>
+            <a:pPr marL="322580" marR="314325" indent="-1905">
+              <a:spcBef>
+                <a:spcPts val="1850"/>
+              </a:spcBef>
+            </a:pPr>
+            <a:r>
+              <a:rPr lang="en-US" sz="2000" b="1" i="1" dirty="0"/>
+              <a:t>ORDER BY: Defines the logical order in which the function processes rows within a partition. This is crucial for functions like RANK() or running totals.</a:t>
+            </a:r>
+          </a:p>
+          <a:p>
+            <a:pPr marL="322580" marR="314325" indent="-1905">
+              <a:spcBef>
+                <a:spcPts val="1850"/>
+              </a:spcBef>
+            </a:pPr>
+            <a:r>
+              <a:rPr lang="en-US" sz="2000" b="1" i="1" dirty="0"/>
+              <a:t>Frame Clause: Defines a subset of the partition (e.g., "the last 3 rows" or "all rows from the start to the current row").</a:t>
+            </a:r>
+          </a:p>
+        </p:txBody>
+      </p:sp>
+      <p:sp>
+        <p:nvSpPr>
+          <p:cNvPr id="13" name="TextBox 12">
+            <a:extLst>
+              <a:ext uri="{FF2B5EF4-FFF2-40B4-BE49-F238E27FC236}">
+                <a16:creationId xmlns:a16="http://schemas.microsoft.com/office/drawing/2014/main" id="{A38BB785-BF8F-C612-E1FC-FFAAA5DB976F}"/>
+              </a:ext>
+            </a:extLst>
+          </p:cNvPr>
+          <p:cNvSpPr txBox="1"/>
+          <p:nvPr/>
+        </p:nvSpPr>
+        <p:spPr>
+          <a:xfrm>
+            <a:off x="6114009" y="3274919"/>
+            <a:ext cx="6097978" cy="3293209"/>
+          </a:xfrm>
+          <a:prstGeom prst="rect">
+            <a:avLst/>
+          </a:prstGeom>
+          <a:noFill/>
+        </p:spPr>
+        <p:txBody>
+          <a:bodyPr wrap="square">
+            <a:spAutoFit/>
+          </a:bodyPr>
+          <a:lstStyle/>
+          <a:p>
+            <a:pPr eaLnBrk="0" fontAlgn="base" hangingPunct="0">
+              <a:spcBef>
+                <a:spcPct val="0"/>
+              </a:spcBef>
+              <a:spcAft>
+                <a:spcPct val="0"/>
+              </a:spcAft>
+            </a:pPr>
+            <a:r>
+              <a:rPr lang="en-US" sz="2000" b="1" spc="30" dirty="0">
+                <a:solidFill>
+                  <a:srgbClr val="2A9FBB"/>
+                </a:solidFill>
+                <a:latin typeface="Verdana" panose="020B0604030504040204"/>
+              </a:rPr>
+              <a:t>Basic Syntax</a:t>
+            </a:r>
+          </a:p>
+          <a:p>
+            <a:pPr eaLnBrk="0" fontAlgn="base" hangingPunct="0">
+              <a:spcBef>
+                <a:spcPct val="0"/>
+              </a:spcBef>
+              <a:spcAft>
+                <a:spcPct val="0"/>
+              </a:spcAft>
+            </a:pPr>
+            <a:r>
+              <a:rPr lang="en-US" sz="2000" spc="30" dirty="0">
+                <a:solidFill>
+                  <a:srgbClr val="2A9FBB"/>
+                </a:solidFill>
+                <a:latin typeface="Verdana" panose="020B0604030504040204"/>
+              </a:rPr>
+              <a:t>The defining feature of a window function is the OVER clause.</a:t>
+            </a:r>
+          </a:p>
+          <a:p>
+            <a:pPr eaLnBrk="0" fontAlgn="base" hangingPunct="0">
+              <a:spcBef>
+                <a:spcPct val="0"/>
+              </a:spcBef>
+              <a:spcAft>
+                <a:spcPct val="0"/>
+              </a:spcAft>
+            </a:pPr>
+            <a:r>
+              <a:rPr lang="en-US" sz="1600" b="1" spc="30" dirty="0">
+                <a:solidFill>
+                  <a:srgbClr val="2A9FBB"/>
+                </a:solidFill>
+                <a:latin typeface="Verdana" panose="020B0604030504040204"/>
+              </a:rPr>
+              <a:t>SELECT </a:t>
+            </a:r>
+          </a:p>
+          <a:p>
+            <a:pPr eaLnBrk="0" fontAlgn="base" hangingPunct="0">
+              <a:spcBef>
+                <a:spcPct val="0"/>
+              </a:spcBef>
+              <a:spcAft>
+                <a:spcPct val="0"/>
+              </a:spcAft>
+            </a:pPr>
+            <a:r>
+              <a:rPr lang="en-US" sz="1600" b="1" spc="30" dirty="0">
+                <a:solidFill>
+                  <a:srgbClr val="2A9FBB"/>
+                </a:solidFill>
+                <a:latin typeface="Verdana" panose="020B0604030504040204"/>
+              </a:rPr>
+              <a:t>    </a:t>
+            </a:r>
+            <a:r>
+              <a:rPr lang="en-US" sz="1600" b="1" spc="30" dirty="0" err="1">
+                <a:solidFill>
+                  <a:srgbClr val="2A9FBB"/>
+                </a:solidFill>
+                <a:latin typeface="Verdana" panose="020B0604030504040204"/>
+              </a:rPr>
+              <a:t>column_name</a:t>
+            </a:r>
+            <a:r>
+              <a:rPr lang="en-US" sz="1600" b="1" spc="30" dirty="0">
+                <a:solidFill>
+                  <a:srgbClr val="2A9FBB"/>
+                </a:solidFill>
+                <a:latin typeface="Verdana" panose="020B0604030504040204"/>
+              </a:rPr>
+              <a:t>,</a:t>
+            </a:r>
+          </a:p>
+          <a:p>
+            <a:pPr eaLnBrk="0" fontAlgn="base" hangingPunct="0">
+              <a:spcBef>
+                <a:spcPct val="0"/>
+              </a:spcBef>
+              <a:spcAft>
+                <a:spcPct val="0"/>
+              </a:spcAft>
+            </a:pPr>
+            <a:r>
+              <a:rPr lang="en-US" sz="1600" b="1" spc="30" dirty="0">
+                <a:solidFill>
+                  <a:srgbClr val="2A9FBB"/>
+                </a:solidFill>
+                <a:latin typeface="Verdana" panose="020B0604030504040204"/>
+              </a:rPr>
+              <a:t>    FUNCTION_NAME() OVER (</a:t>
+            </a:r>
+          </a:p>
+          <a:p>
+            <a:pPr eaLnBrk="0" fontAlgn="base" hangingPunct="0">
+              <a:spcBef>
+                <a:spcPct val="0"/>
+              </a:spcBef>
+              <a:spcAft>
+                <a:spcPct val="0"/>
+              </a:spcAft>
+            </a:pPr>
+            <a:r>
+              <a:rPr lang="en-US" sz="1600" b="1" spc="30" dirty="0">
+                <a:solidFill>
+                  <a:srgbClr val="2A9FBB"/>
+                </a:solidFill>
+                <a:latin typeface="Verdana" panose="020B0604030504040204"/>
+              </a:rPr>
+              <a:t>        [PARTITION BY column_1, column_2, ...]</a:t>
+            </a:r>
+          </a:p>
+          <a:p>
+            <a:pPr eaLnBrk="0" fontAlgn="base" hangingPunct="0">
+              <a:spcBef>
+                <a:spcPct val="0"/>
+              </a:spcBef>
+              <a:spcAft>
+                <a:spcPct val="0"/>
+              </a:spcAft>
+            </a:pPr>
+            <a:r>
+              <a:rPr lang="en-US" sz="1600" b="1" spc="30" dirty="0">
+                <a:solidFill>
+                  <a:srgbClr val="2A9FBB"/>
+                </a:solidFill>
+                <a:latin typeface="Verdana" panose="020B0604030504040204"/>
+              </a:rPr>
+              <a:t>        [ORDER BY </a:t>
+            </a:r>
+            <a:r>
+              <a:rPr lang="en-US" sz="1600" b="1" spc="30" dirty="0" err="1">
+                <a:solidFill>
+                  <a:srgbClr val="2A9FBB"/>
+                </a:solidFill>
+                <a:latin typeface="Verdana" panose="020B0604030504040204"/>
+              </a:rPr>
+              <a:t>column_A</a:t>
+            </a:r>
+            <a:r>
+              <a:rPr lang="en-US" sz="1600" b="1" spc="30" dirty="0">
+                <a:solidFill>
+                  <a:srgbClr val="2A9FBB"/>
+                </a:solidFill>
+                <a:latin typeface="Verdana" panose="020B0604030504040204"/>
+              </a:rPr>
+              <a:t> [ASC|DESC]]</a:t>
+            </a:r>
+          </a:p>
+          <a:p>
+            <a:pPr eaLnBrk="0" fontAlgn="base" hangingPunct="0">
+              <a:spcBef>
+                <a:spcPct val="0"/>
+              </a:spcBef>
+              <a:spcAft>
+                <a:spcPct val="0"/>
+              </a:spcAft>
+            </a:pPr>
+            <a:r>
+              <a:rPr lang="en-US" sz="1600" b="1" spc="30" dirty="0">
+                <a:solidFill>
+                  <a:srgbClr val="2A9FBB"/>
+                </a:solidFill>
+                <a:latin typeface="Verdana" panose="020B0604030504040204"/>
+              </a:rPr>
+              <a:t>        [</a:t>
+            </a:r>
+            <a:r>
+              <a:rPr lang="en-US" sz="1600" b="1" spc="30" dirty="0" err="1">
+                <a:solidFill>
+                  <a:srgbClr val="2A9FBB"/>
+                </a:solidFill>
+                <a:latin typeface="Verdana" panose="020B0604030504040204"/>
+              </a:rPr>
+              <a:t>frame_clause</a:t>
+            </a:r>
+            <a:r>
+              <a:rPr lang="en-US" sz="1600" b="1" spc="30" dirty="0">
+                <a:solidFill>
+                  <a:srgbClr val="2A9FBB"/>
+                </a:solidFill>
+                <a:latin typeface="Verdana" panose="020B0604030504040204"/>
+              </a:rPr>
+              <a:t>]</a:t>
+            </a:r>
+          </a:p>
+          <a:p>
+            <a:pPr eaLnBrk="0" fontAlgn="base" hangingPunct="0">
+              <a:spcBef>
+                <a:spcPct val="0"/>
+              </a:spcBef>
+              <a:spcAft>
+                <a:spcPct val="0"/>
+              </a:spcAft>
+            </a:pPr>
+            <a:r>
+              <a:rPr lang="en-US" sz="1600" b="1" spc="30" dirty="0">
+                <a:solidFill>
+                  <a:srgbClr val="2A9FBB"/>
+                </a:solidFill>
+                <a:latin typeface="Verdana" panose="020B0604030504040204"/>
+              </a:rPr>
+              <a:t>    ) AS </a:t>
+            </a:r>
+            <a:r>
+              <a:rPr lang="en-US" sz="1600" b="1" spc="30" dirty="0" err="1">
+                <a:solidFill>
+                  <a:srgbClr val="2A9FBB"/>
+                </a:solidFill>
+                <a:latin typeface="Verdana" panose="020B0604030504040204"/>
+              </a:rPr>
+              <a:t>alias_name</a:t>
+            </a:r>
+            <a:endParaRPr lang="en-US" sz="1600" b="1" spc="30" dirty="0">
+              <a:solidFill>
+                <a:srgbClr val="2A9FBB"/>
+              </a:solidFill>
+              <a:latin typeface="Verdana" panose="020B0604030504040204"/>
+            </a:endParaRPr>
+          </a:p>
+          <a:p>
+            <a:pPr eaLnBrk="0" fontAlgn="base" hangingPunct="0">
+              <a:spcBef>
+                <a:spcPct val="0"/>
+              </a:spcBef>
+              <a:spcAft>
+                <a:spcPct val="0"/>
+              </a:spcAft>
+            </a:pPr>
+            <a:r>
+              <a:rPr lang="en-US" sz="1600" b="1" spc="30" dirty="0">
+                <a:solidFill>
+                  <a:srgbClr val="2A9FBB"/>
+                </a:solidFill>
+                <a:latin typeface="Verdana" panose="020B0604030504040204"/>
+              </a:rPr>
+              <a:t>FROM </a:t>
+            </a:r>
+            <a:r>
+              <a:rPr lang="en-US" sz="1600" b="1" spc="30" dirty="0" err="1">
+                <a:solidFill>
+                  <a:srgbClr val="2A9FBB"/>
+                </a:solidFill>
+                <a:latin typeface="Verdana" panose="020B0604030504040204"/>
+              </a:rPr>
+              <a:t>table_name</a:t>
+            </a:r>
+            <a:r>
+              <a:rPr lang="en-US" sz="1600" b="1" spc="30" dirty="0">
+                <a:solidFill>
+                  <a:srgbClr val="2A9FBB"/>
+                </a:solidFill>
+                <a:latin typeface="Verdana" panose="020B0604030504040204"/>
+              </a:rPr>
+              <a:t>;</a:t>
+            </a:r>
+          </a:p>
+          <a:p>
+            <a:pPr marL="0" marR="0" lvl="0" indent="0" algn="l" defTabSz="914400" rtl="0" eaLnBrk="0" fontAlgn="base" latinLnBrk="0" hangingPunct="0">
+              <a:lnSpc>
+                <a:spcPct val="100000"/>
+              </a:lnSpc>
+              <a:spcBef>
+                <a:spcPct val="0"/>
+              </a:spcBef>
+              <a:spcAft>
+                <a:spcPct val="0"/>
+              </a:spcAft>
+              <a:buClrTx/>
+              <a:buSzTx/>
+              <a:tabLst/>
+            </a:pPr>
+            <a:endParaRPr lang="en-US" altLang="en-US" sz="2000" spc="30" dirty="0">
+              <a:solidFill>
+                <a:srgbClr val="2A9FBB"/>
+              </a:solidFill>
+              <a:latin typeface="Verdana" panose="020B0604030504040204"/>
+            </a:endParaRPr>
+          </a:p>
+        </p:txBody>
+      </p:sp>
+    </p:spTree>
+    <p:extLst>
+      <p:ext uri="{BB962C8B-B14F-4D97-AF65-F5344CB8AC3E}">
+        <p14:creationId xmlns:p14="http://schemas.microsoft.com/office/powerpoint/2010/main" val="3512157901"/>
+      </p:ext>
+    </p:extLst>
+  </p:cSld>
+  <p:clrMapOvr>
+    <a:masterClrMapping/>
+  </p:clrMapOvr>
+</p:sld>
+</file>
+
+<file path=ppt/slides/slide28.xml><?xml version="1.0" encoding="utf-8"?>
+<p:sld xmlns:a="http://schemas.openxmlformats.org/drawingml/2006/main" xmlns:r="http://schemas.openxmlformats.org/officeDocument/2006/relationships" xmlns:p="http://schemas.openxmlformats.org/presentationml/2006/main">
+  <p:cSld>
+    <p:spTree>
+      <p:nvGrpSpPr>
         <p:cNvPr id="1" name=""/>
         <p:cNvGrpSpPr/>
         <p:nvPr/>
@@ -17566,548 +18251,16 @@
           <a:chExt cx="0" cy="0"/>
         </a:xfrm>
       </p:grpSpPr>
-      <p:pic>
-        <p:nvPicPr>
-          <p:cNvPr id="2" name="object 2"/>
-          <p:cNvPicPr/>
-          <p:nvPr/>
-        </p:nvPicPr>
-        <p:blipFill>
-          <a:blip r:embed="rId2" cstate="print"/>
-          <a:stretch>
-            <a:fillRect/>
-          </a:stretch>
-        </p:blipFill>
-        <p:spPr>
-          <a:xfrm>
-            <a:off x="0" y="0"/>
-            <a:ext cx="4635246" cy="6858000"/>
-          </a:xfrm>
-          <a:prstGeom prst="rect">
-            <a:avLst/>
-          </a:prstGeom>
-        </p:spPr>
-      </p:pic>
       <p:sp>
         <p:nvSpPr>
-          <p:cNvPr id="3" name="object 3"/>
-          <p:cNvSpPr txBox="1"/>
-          <p:nvPr/>
-        </p:nvSpPr>
-        <p:spPr>
-          <a:xfrm>
-            <a:off x="5230620" y="2079350"/>
-            <a:ext cx="6437630" cy="2463800"/>
-          </a:xfrm>
-          <a:prstGeom prst="rect">
-            <a:avLst/>
-          </a:prstGeom>
-        </p:spPr>
-        <p:txBody>
-          <a:bodyPr vert="horz" wrap="square" lIns="0" tIns="12700" rIns="0" bIns="0" rtlCol="0">
-            <a:spAutoFit/>
-          </a:bodyPr>
-          <a:lstStyle/>
-          <a:p>
-            <a:pPr marL="12700">
-              <a:lnSpc>
-                <a:spcPct val="100000"/>
-              </a:lnSpc>
-              <a:spcBef>
-                <a:spcPts val="100"/>
-              </a:spcBef>
-            </a:pPr>
-            <a:r>
-              <a:rPr sz="2400" spc="80" dirty="0">
-                <a:solidFill>
-                  <a:srgbClr val="EF5A28"/>
-                </a:solidFill>
-                <a:latin typeface="Verdana" panose="020B0604030504040204"/>
-                <a:cs typeface="Verdana" panose="020B0604030504040204"/>
-              </a:rPr>
-              <a:t>ORDER</a:t>
-            </a:r>
-            <a:r>
-              <a:rPr sz="2400" spc="-135" dirty="0">
-                <a:solidFill>
-                  <a:srgbClr val="EF5A28"/>
-                </a:solidFill>
-                <a:latin typeface="Verdana" panose="020B0604030504040204"/>
-                <a:cs typeface="Verdana" panose="020B0604030504040204"/>
-              </a:rPr>
-              <a:t> </a:t>
-            </a:r>
-            <a:r>
-              <a:rPr sz="2400" spc="160" dirty="0">
-                <a:solidFill>
-                  <a:srgbClr val="EF5A28"/>
-                </a:solidFill>
-                <a:latin typeface="Verdana" panose="020B0604030504040204"/>
-                <a:cs typeface="Verdana" panose="020B0604030504040204"/>
-              </a:rPr>
-              <a:t>BY</a:t>
-            </a:r>
-            <a:r>
-              <a:rPr sz="2400" spc="-135" dirty="0">
-                <a:solidFill>
-                  <a:srgbClr val="EF5A28"/>
-                </a:solidFill>
-                <a:latin typeface="Verdana" panose="020B0604030504040204"/>
-                <a:cs typeface="Verdana" panose="020B0604030504040204"/>
-              </a:rPr>
-              <a:t> </a:t>
-            </a:r>
-            <a:r>
-              <a:rPr sz="2400" dirty="0">
-                <a:solidFill>
-                  <a:srgbClr val="EF5A28"/>
-                </a:solidFill>
-                <a:latin typeface="Verdana" panose="020B0604030504040204"/>
-                <a:cs typeface="Verdana" panose="020B0604030504040204"/>
-              </a:rPr>
-              <a:t>sorts</a:t>
-            </a:r>
-            <a:r>
-              <a:rPr sz="2400" spc="-135" dirty="0">
-                <a:solidFill>
-                  <a:srgbClr val="EF5A28"/>
-                </a:solidFill>
-                <a:latin typeface="Verdana" panose="020B0604030504040204"/>
-                <a:cs typeface="Verdana" panose="020B0604030504040204"/>
-              </a:rPr>
-              <a:t> </a:t>
-            </a:r>
-            <a:r>
-              <a:rPr sz="2400" spc="15" dirty="0">
-                <a:solidFill>
-                  <a:srgbClr val="EF5A28"/>
-                </a:solidFill>
-                <a:latin typeface="Verdana" panose="020B0604030504040204"/>
-                <a:cs typeface="Verdana" panose="020B0604030504040204"/>
-              </a:rPr>
-              <a:t>query</a:t>
-            </a:r>
-            <a:r>
-              <a:rPr sz="2400" spc="-130" dirty="0">
-                <a:solidFill>
-                  <a:srgbClr val="EF5A28"/>
-                </a:solidFill>
-                <a:latin typeface="Verdana" panose="020B0604030504040204"/>
-                <a:cs typeface="Verdana" panose="020B0604030504040204"/>
-              </a:rPr>
-              <a:t> </a:t>
-            </a:r>
-            <a:r>
-              <a:rPr sz="2400" spc="-15" dirty="0">
-                <a:solidFill>
-                  <a:srgbClr val="EF5A28"/>
-                </a:solidFill>
-                <a:latin typeface="Verdana" panose="020B0604030504040204"/>
-                <a:cs typeface="Verdana" panose="020B0604030504040204"/>
-              </a:rPr>
-              <a:t>results</a:t>
-            </a:r>
-            <a:endParaRPr sz="2400">
-              <a:latin typeface="Verdana" panose="020B0604030504040204"/>
-              <a:cs typeface="Verdana" panose="020B0604030504040204"/>
-            </a:endParaRPr>
-          </a:p>
-          <a:p>
-            <a:pPr marL="12700">
-              <a:lnSpc>
-                <a:spcPct val="100000"/>
-              </a:lnSpc>
-              <a:spcBef>
-                <a:spcPts val="1800"/>
-              </a:spcBef>
-            </a:pPr>
-            <a:r>
-              <a:rPr sz="2400" spc="65" dirty="0">
-                <a:solidFill>
-                  <a:srgbClr val="EF5A28"/>
-                </a:solidFill>
-                <a:latin typeface="Verdana" panose="020B0604030504040204"/>
-                <a:cs typeface="Verdana" panose="020B0604030504040204"/>
-              </a:rPr>
-              <a:t>Aggregate</a:t>
-            </a:r>
-            <a:r>
-              <a:rPr sz="2400" spc="-140" dirty="0">
-                <a:solidFill>
-                  <a:srgbClr val="EF5A28"/>
-                </a:solidFill>
-                <a:latin typeface="Verdana" panose="020B0604030504040204"/>
-                <a:cs typeface="Verdana" panose="020B0604030504040204"/>
-              </a:rPr>
-              <a:t> </a:t>
-            </a:r>
-            <a:r>
-              <a:rPr sz="2400" spc="20" dirty="0">
-                <a:solidFill>
-                  <a:srgbClr val="EF5A28"/>
-                </a:solidFill>
-                <a:latin typeface="Verdana" panose="020B0604030504040204"/>
-                <a:cs typeface="Verdana" panose="020B0604030504040204"/>
-              </a:rPr>
-              <a:t>functions</a:t>
-            </a:r>
-            <a:r>
-              <a:rPr sz="2400" spc="-135" dirty="0">
-                <a:solidFill>
-                  <a:srgbClr val="EF5A28"/>
-                </a:solidFill>
-                <a:latin typeface="Verdana" panose="020B0604030504040204"/>
-                <a:cs typeface="Verdana" panose="020B0604030504040204"/>
-              </a:rPr>
-              <a:t> </a:t>
-            </a:r>
-            <a:r>
-              <a:rPr sz="2400" spc="25" dirty="0">
-                <a:solidFill>
-                  <a:srgbClr val="EF5A28"/>
-                </a:solidFill>
-                <a:latin typeface="Verdana" panose="020B0604030504040204"/>
-                <a:cs typeface="Verdana" panose="020B0604030504040204"/>
-              </a:rPr>
-              <a:t>perform</a:t>
-            </a:r>
-            <a:r>
-              <a:rPr sz="2400" spc="-135" dirty="0">
-                <a:solidFill>
-                  <a:srgbClr val="EF5A28"/>
-                </a:solidFill>
-                <a:latin typeface="Verdana" panose="020B0604030504040204"/>
-                <a:cs typeface="Verdana" panose="020B0604030504040204"/>
-              </a:rPr>
-              <a:t> </a:t>
-            </a:r>
-            <a:r>
-              <a:rPr sz="2400" spc="25" dirty="0">
-                <a:solidFill>
-                  <a:srgbClr val="EF5A28"/>
-                </a:solidFill>
-                <a:latin typeface="Verdana" panose="020B0604030504040204"/>
-                <a:cs typeface="Verdana" panose="020B0604030504040204"/>
-              </a:rPr>
-              <a:t>calculations</a:t>
-            </a:r>
-            <a:endParaRPr sz="2400">
-              <a:latin typeface="Verdana" panose="020B0604030504040204"/>
-              <a:cs typeface="Verdana" panose="020B0604030504040204"/>
-            </a:endParaRPr>
-          </a:p>
-          <a:p>
-            <a:pPr marL="536575" indent="-289560">
-              <a:lnSpc>
-                <a:spcPct val="100000"/>
-              </a:lnSpc>
-              <a:spcBef>
-                <a:spcPts val="600"/>
-              </a:spcBef>
-              <a:buSzPct val="75000"/>
-              <a:buFont typeface="Segoe UI" panose="020B0502040204020203"/>
-              <a:buChar char="-"/>
-              <a:tabLst>
-                <a:tab pos="536575" algn="l"/>
-                <a:tab pos="537210" algn="l"/>
-              </a:tabLst>
-            </a:pPr>
-            <a:r>
-              <a:rPr sz="2400" spc="55" dirty="0">
-                <a:solidFill>
-                  <a:srgbClr val="EF5A28"/>
-                </a:solidFill>
-                <a:latin typeface="Verdana" panose="020B0604030504040204"/>
-                <a:cs typeface="Verdana" panose="020B0604030504040204"/>
-              </a:rPr>
-              <a:t>On</a:t>
-            </a:r>
-            <a:r>
-              <a:rPr sz="2400" spc="-150" dirty="0">
-                <a:solidFill>
-                  <a:srgbClr val="EF5A28"/>
-                </a:solidFill>
-                <a:latin typeface="Verdana" panose="020B0604030504040204"/>
-                <a:cs typeface="Verdana" panose="020B0604030504040204"/>
-              </a:rPr>
-              <a:t> </a:t>
-            </a:r>
-            <a:r>
-              <a:rPr sz="2400" spc="-30" dirty="0">
-                <a:solidFill>
-                  <a:srgbClr val="EF5A28"/>
-                </a:solidFill>
-                <a:latin typeface="Verdana" panose="020B0604030504040204"/>
-                <a:cs typeface="Verdana" panose="020B0604030504040204"/>
-              </a:rPr>
-              <a:t>entire</a:t>
-            </a:r>
-            <a:r>
-              <a:rPr sz="2400" spc="-135" dirty="0">
-                <a:solidFill>
-                  <a:srgbClr val="EF5A28"/>
-                </a:solidFill>
-                <a:latin typeface="Verdana" panose="020B0604030504040204"/>
-                <a:cs typeface="Verdana" panose="020B0604030504040204"/>
-              </a:rPr>
-              <a:t> </a:t>
-            </a:r>
-            <a:r>
-              <a:rPr sz="2400" dirty="0">
-                <a:solidFill>
-                  <a:srgbClr val="EF5A28"/>
-                </a:solidFill>
-                <a:latin typeface="Verdana" panose="020B0604030504040204"/>
-                <a:cs typeface="Verdana" panose="020B0604030504040204"/>
-              </a:rPr>
-              <a:t>data</a:t>
-            </a:r>
-            <a:r>
-              <a:rPr sz="2400" spc="-145" dirty="0">
-                <a:solidFill>
-                  <a:srgbClr val="EF5A28"/>
-                </a:solidFill>
-                <a:latin typeface="Verdana" panose="020B0604030504040204"/>
-                <a:cs typeface="Verdana" panose="020B0604030504040204"/>
-              </a:rPr>
-              <a:t> </a:t>
-            </a:r>
-            <a:r>
-              <a:rPr sz="2400" spc="-20" dirty="0">
-                <a:solidFill>
-                  <a:srgbClr val="EF5A28"/>
-                </a:solidFill>
-                <a:latin typeface="Verdana" panose="020B0604030504040204"/>
-                <a:cs typeface="Verdana" panose="020B0604030504040204"/>
-              </a:rPr>
-              <a:t>set</a:t>
-            </a:r>
-            <a:endParaRPr sz="2400">
-              <a:latin typeface="Verdana" panose="020B0604030504040204"/>
-              <a:cs typeface="Verdana" panose="020B0604030504040204"/>
-            </a:endParaRPr>
-          </a:p>
-          <a:p>
-            <a:pPr marL="536575" indent="-289560">
-              <a:lnSpc>
-                <a:spcPct val="100000"/>
-              </a:lnSpc>
-              <a:spcBef>
-                <a:spcPts val="600"/>
-              </a:spcBef>
-              <a:buSzPct val="75000"/>
-              <a:buFont typeface="Segoe UI" panose="020B0502040204020203"/>
-              <a:buChar char="-"/>
-              <a:tabLst>
-                <a:tab pos="536575" algn="l"/>
-                <a:tab pos="537210" algn="l"/>
-              </a:tabLst>
-            </a:pPr>
-            <a:r>
-              <a:rPr sz="2400" spc="55" dirty="0">
-                <a:solidFill>
-                  <a:srgbClr val="EF5A28"/>
-                </a:solidFill>
-                <a:latin typeface="Verdana" panose="020B0604030504040204"/>
-                <a:cs typeface="Verdana" panose="020B0604030504040204"/>
-              </a:rPr>
-              <a:t>On</a:t>
-            </a:r>
-            <a:r>
-              <a:rPr sz="2400" spc="-140" dirty="0">
-                <a:solidFill>
-                  <a:srgbClr val="EF5A28"/>
-                </a:solidFill>
-                <a:latin typeface="Verdana" panose="020B0604030504040204"/>
-                <a:cs typeface="Verdana" panose="020B0604030504040204"/>
-              </a:rPr>
-              <a:t> </a:t>
-            </a:r>
-            <a:r>
-              <a:rPr sz="2400" spc="10" dirty="0">
-                <a:solidFill>
-                  <a:srgbClr val="EF5A28"/>
-                </a:solidFill>
-                <a:latin typeface="Verdana" panose="020B0604030504040204"/>
-                <a:cs typeface="Verdana" panose="020B0604030504040204"/>
-              </a:rPr>
-              <a:t>groups</a:t>
-            </a:r>
-            <a:r>
-              <a:rPr sz="2400" spc="-130" dirty="0">
-                <a:solidFill>
-                  <a:srgbClr val="EF5A28"/>
-                </a:solidFill>
-                <a:latin typeface="Verdana" panose="020B0604030504040204"/>
-                <a:cs typeface="Verdana" panose="020B0604030504040204"/>
-              </a:rPr>
-              <a:t> </a:t>
-            </a:r>
-            <a:r>
-              <a:rPr sz="2400" spc="20" dirty="0">
-                <a:solidFill>
-                  <a:srgbClr val="EF5A28"/>
-                </a:solidFill>
-                <a:latin typeface="Verdana" panose="020B0604030504040204"/>
-                <a:cs typeface="Verdana" panose="020B0604030504040204"/>
-              </a:rPr>
-              <a:t>specified</a:t>
-            </a:r>
-            <a:r>
-              <a:rPr sz="2400" spc="-140" dirty="0">
-                <a:solidFill>
-                  <a:srgbClr val="EF5A28"/>
-                </a:solidFill>
-                <a:latin typeface="Verdana" panose="020B0604030504040204"/>
-                <a:cs typeface="Verdana" panose="020B0604030504040204"/>
-              </a:rPr>
-              <a:t> </a:t>
-            </a:r>
-            <a:r>
-              <a:rPr sz="2400" spc="-20" dirty="0">
-                <a:solidFill>
-                  <a:srgbClr val="EF5A28"/>
-                </a:solidFill>
-                <a:latin typeface="Verdana" panose="020B0604030504040204"/>
-                <a:cs typeface="Verdana" panose="020B0604030504040204"/>
-              </a:rPr>
-              <a:t>using</a:t>
-            </a:r>
-            <a:r>
-              <a:rPr sz="2400" spc="-130" dirty="0">
-                <a:solidFill>
-                  <a:srgbClr val="EF5A28"/>
-                </a:solidFill>
-                <a:latin typeface="Verdana" panose="020B0604030504040204"/>
-                <a:cs typeface="Verdana" panose="020B0604030504040204"/>
-              </a:rPr>
-              <a:t> </a:t>
-            </a:r>
-            <a:r>
-              <a:rPr sz="2400" spc="90" dirty="0">
-                <a:solidFill>
-                  <a:srgbClr val="EF5A28"/>
-                </a:solidFill>
-                <a:latin typeface="Verdana" panose="020B0604030504040204"/>
-                <a:cs typeface="Verdana" panose="020B0604030504040204"/>
-              </a:rPr>
-              <a:t>GROUP</a:t>
-            </a:r>
-            <a:r>
-              <a:rPr sz="2400" spc="-125" dirty="0">
-                <a:solidFill>
-                  <a:srgbClr val="EF5A28"/>
-                </a:solidFill>
-                <a:latin typeface="Verdana" panose="020B0604030504040204"/>
-                <a:cs typeface="Verdana" panose="020B0604030504040204"/>
-              </a:rPr>
-              <a:t> </a:t>
-            </a:r>
-            <a:r>
-              <a:rPr sz="2400" spc="125" dirty="0">
-                <a:solidFill>
-                  <a:srgbClr val="EF5A28"/>
-                </a:solidFill>
-                <a:latin typeface="Verdana" panose="020B0604030504040204"/>
-                <a:cs typeface="Verdana" panose="020B0604030504040204"/>
-              </a:rPr>
-              <a:t>BY</a:t>
-            </a:r>
-            <a:endParaRPr sz="2400">
-              <a:latin typeface="Verdana" panose="020B0604030504040204"/>
-              <a:cs typeface="Verdana" panose="020B0604030504040204"/>
-            </a:endParaRPr>
-          </a:p>
-          <a:p>
-            <a:pPr marL="12700">
-              <a:lnSpc>
-                <a:spcPct val="100000"/>
-              </a:lnSpc>
-              <a:spcBef>
-                <a:spcPts val="1800"/>
-              </a:spcBef>
-            </a:pPr>
-            <a:r>
-              <a:rPr sz="2400" spc="50" dirty="0">
-                <a:solidFill>
-                  <a:srgbClr val="EF5A28"/>
-                </a:solidFill>
-                <a:latin typeface="Verdana" panose="020B0604030504040204"/>
-                <a:cs typeface="Verdana" panose="020B0604030504040204"/>
-              </a:rPr>
-              <a:t>HAVING</a:t>
-            </a:r>
-            <a:r>
-              <a:rPr sz="2400" spc="-120" dirty="0">
-                <a:solidFill>
-                  <a:srgbClr val="EF5A28"/>
-                </a:solidFill>
-                <a:latin typeface="Verdana" panose="020B0604030504040204"/>
-                <a:cs typeface="Verdana" panose="020B0604030504040204"/>
-              </a:rPr>
-              <a:t> </a:t>
-            </a:r>
-            <a:r>
-              <a:rPr sz="2400" spc="10" dirty="0">
-                <a:solidFill>
-                  <a:srgbClr val="EF5A28"/>
-                </a:solidFill>
-                <a:latin typeface="Verdana" panose="020B0604030504040204"/>
-                <a:cs typeface="Verdana" panose="020B0604030504040204"/>
-              </a:rPr>
-              <a:t>filters</a:t>
-            </a:r>
-            <a:r>
-              <a:rPr sz="2400" spc="-114" dirty="0">
-                <a:solidFill>
-                  <a:srgbClr val="EF5A28"/>
-                </a:solidFill>
-                <a:latin typeface="Verdana" panose="020B0604030504040204"/>
-                <a:cs typeface="Verdana" panose="020B0604030504040204"/>
-              </a:rPr>
-              <a:t> </a:t>
-            </a:r>
-            <a:r>
-              <a:rPr sz="2400" spc="35" dirty="0">
-                <a:solidFill>
-                  <a:srgbClr val="EF5A28"/>
-                </a:solidFill>
-                <a:latin typeface="Verdana" panose="020B0604030504040204"/>
-                <a:cs typeface="Verdana" panose="020B0604030504040204"/>
-              </a:rPr>
-              <a:t>aggregate</a:t>
-            </a:r>
-            <a:r>
-              <a:rPr sz="2400" spc="-114" dirty="0">
-                <a:solidFill>
-                  <a:srgbClr val="EF5A28"/>
-                </a:solidFill>
-                <a:latin typeface="Verdana" panose="020B0604030504040204"/>
-                <a:cs typeface="Verdana" panose="020B0604030504040204"/>
-              </a:rPr>
-              <a:t> </a:t>
-            </a:r>
-            <a:r>
-              <a:rPr sz="2400" spc="-15" dirty="0">
-                <a:solidFill>
-                  <a:srgbClr val="EF5A28"/>
-                </a:solidFill>
-                <a:latin typeface="Verdana" panose="020B0604030504040204"/>
-                <a:cs typeface="Verdana" panose="020B0604030504040204"/>
-              </a:rPr>
-              <a:t>results</a:t>
-            </a:r>
-            <a:endParaRPr sz="2400">
-              <a:latin typeface="Verdana" panose="020B0604030504040204"/>
-              <a:cs typeface="Verdana" panose="020B0604030504040204"/>
-            </a:endParaRPr>
-          </a:p>
-        </p:txBody>
-      </p:sp>
-      <p:sp>
-        <p:nvSpPr>
-          <p:cNvPr id="4" name="object 4"/>
-          <p:cNvSpPr txBox="1">
+          <p:cNvPr id="2" name="Title 1">
+            <a:extLst>
+              <a:ext uri="{FF2B5EF4-FFF2-40B4-BE49-F238E27FC236}">
+                <a16:creationId xmlns:a16="http://schemas.microsoft.com/office/drawing/2014/main" id="{57475FA5-A969-A3E6-2664-39F2D81ABA23}"/>
+              </a:ext>
+            </a:extLst>
+          </p:cNvPr>
+          <p:cNvSpPr>
             <a:spLocks noGrp="1"/>
           </p:cNvSpPr>
           <p:nvPr>
@@ -18116,49 +18269,35 @@
         </p:nvSpPr>
         <p:spPr>
           <a:xfrm>
-            <a:off x="1226374" y="1916483"/>
-            <a:ext cx="2182495" cy="574040"/>
+            <a:off x="1524000" y="480059"/>
+            <a:ext cx="9739251" cy="574039"/>
           </a:xfrm>
-          <a:prstGeom prst="rect">
-            <a:avLst/>
-          </a:prstGeom>
         </p:spPr>
         <p:txBody>
-          <a:bodyPr vert="horz" wrap="square" lIns="0" tIns="12700" rIns="0" bIns="0" rtlCol="0">
-            <a:spAutoFit/>
-          </a:bodyPr>
+          <a:bodyPr/>
           <a:lstStyle/>
           <a:p>
-            <a:pPr marL="12700">
-              <a:lnSpc>
-                <a:spcPct val="100000"/>
-              </a:lnSpc>
-              <a:spcBef>
-                <a:spcPts val="100"/>
-              </a:spcBef>
-            </a:pPr>
-            <a:r>
-              <a:rPr spc="-105" dirty="0"/>
-              <a:t>Sum</a:t>
-            </a:r>
-            <a:r>
-              <a:rPr spc="-80" dirty="0"/>
-              <a:t>m</a:t>
-            </a:r>
-            <a:r>
-              <a:rPr spc="-105" dirty="0"/>
-              <a:t>a</a:t>
-            </a:r>
-            <a:r>
-              <a:rPr spc="-55" dirty="0"/>
-              <a:t>ry</a:t>
+            <a:pPr algn="ctr"/>
+            <a:r>
+              <a:rPr lang="en-IN" dirty="0">
+                <a:solidFill>
+                  <a:schemeClr val="tx1"/>
+                </a:solidFill>
+              </a:rPr>
+              <a:t>Common Window Functions</a:t>
             </a:r>
           </a:p>
         </p:txBody>
       </p:sp>
       <p:sp>
         <p:nvSpPr>
-          <p:cNvPr id="5" name="Slide Number Placeholder 4"/>
+          <p:cNvPr id="4" name="Slide Number Placeholder 3">
+            <a:extLst>
+              <a:ext uri="{FF2B5EF4-FFF2-40B4-BE49-F238E27FC236}">
+                <a16:creationId xmlns:a16="http://schemas.microsoft.com/office/drawing/2014/main" id="{D2FEBCEC-CD9D-AD36-7EFF-50BC57385AEC}"/>
+              </a:ext>
+            </a:extLst>
+          </p:cNvPr>
           <p:cNvSpPr>
             <a:spLocks noGrp="1"/>
           </p:cNvSpPr>
@@ -18172,14 +18311,968 @@
           <a:lstStyle/>
           <a:p>
             <a:fld id="{B6F15528-21DE-4FAA-801E-634DDDAF4B2B}" type="slidenum">
-              <a:rPr/>
-              <a:t>27</a:t>
+              <a:rPr lang="en-IN" smtClean="0"/>
+              <a:t>28</a:t>
             </a:fld>
-            <a:endParaRPr/>
+            <a:endParaRPr lang="en-IN"/>
+          </a:p>
+        </p:txBody>
+      </p:sp>
+      <p:graphicFrame>
+        <p:nvGraphicFramePr>
+          <p:cNvPr id="5" name="Table 4">
+            <a:extLst>
+              <a:ext uri="{FF2B5EF4-FFF2-40B4-BE49-F238E27FC236}">
+                <a16:creationId xmlns:a16="http://schemas.microsoft.com/office/drawing/2014/main" id="{D2AA992F-C519-155A-3E5F-07F78A3A3ADA}"/>
+              </a:ext>
+            </a:extLst>
+          </p:cNvPr>
+          <p:cNvGraphicFramePr>
+            <a:graphicFrameLocks noGrp="1"/>
+          </p:cNvGraphicFramePr>
+          <p:nvPr>
+            <p:extLst>
+              <p:ext uri="{D42A27DB-BD31-4B8C-83A1-F6EECF244321}">
+                <p14:modId xmlns:p14="http://schemas.microsoft.com/office/powerpoint/2010/main" val="1366736489"/>
+              </p:ext>
+            </p:extLst>
+          </p:nvPr>
+        </p:nvGraphicFramePr>
+        <p:xfrm>
+          <a:off x="2029835" y="2209800"/>
+          <a:ext cx="8128000" cy="2113280"/>
+        </p:xfrm>
+        <a:graphic>
+          <a:graphicData uri="http://schemas.openxmlformats.org/drawingml/2006/table">
+            <a:tbl>
+              <a:tblPr firstRow="1" bandRow="1">
+                <a:tableStyleId>{5C22544A-7EE6-4342-B048-85BDC9FD1C3A}</a:tableStyleId>
+              </a:tblPr>
+              <a:tblGrid>
+                <a:gridCol w="2557155">
+                  <a:extLst>
+                    <a:ext uri="{9D8B030D-6E8A-4147-A177-3AD203B41FA5}">
+                      <a16:colId xmlns:a16="http://schemas.microsoft.com/office/drawing/2014/main" val="4214551485"/>
+                    </a:ext>
+                  </a:extLst>
+                </a:gridCol>
+                <a:gridCol w="5570845">
+                  <a:extLst>
+                    <a:ext uri="{9D8B030D-6E8A-4147-A177-3AD203B41FA5}">
+                      <a16:colId xmlns:a16="http://schemas.microsoft.com/office/drawing/2014/main" val="458204844"/>
+                    </a:ext>
+                  </a:extLst>
+                </a:gridCol>
+              </a:tblGrid>
+              <a:tr h="370840">
+                <a:tc>
+                  <a:txBody>
+                    <a:bodyPr/>
+                    <a:lstStyle/>
+                    <a:p>
+                      <a:pPr>
+                        <a:buNone/>
+                      </a:pPr>
+                      <a:r>
+                        <a:rPr lang="en-IN" dirty="0"/>
+                        <a:t>Function</a:t>
+                      </a:r>
+                    </a:p>
+                  </a:txBody>
+                  <a:tcPr anchor="ctr"/>
+                </a:tc>
+                <a:tc>
+                  <a:txBody>
+                    <a:bodyPr/>
+                    <a:lstStyle/>
+                    <a:p>
+                      <a:pPr>
+                        <a:buNone/>
+                      </a:pPr>
+                      <a:r>
+                        <a:rPr lang="en-IN" dirty="0"/>
+                        <a:t>Description</a:t>
+                      </a:r>
+                    </a:p>
+                  </a:txBody>
+                  <a:tcPr anchor="ctr"/>
+                </a:tc>
+                <a:extLst>
+                  <a:ext uri="{0D108BD9-81ED-4DB2-BD59-A6C34878D82A}">
+                    <a16:rowId xmlns:a16="http://schemas.microsoft.com/office/drawing/2014/main" val="3511679844"/>
+                  </a:ext>
+                </a:extLst>
+              </a:tr>
+              <a:tr h="370840">
+                <a:tc>
+                  <a:txBody>
+                    <a:bodyPr/>
+                    <a:lstStyle/>
+                    <a:p>
+                      <a:r>
+                        <a:rPr lang="en-IN" b="1" dirty="0"/>
+                        <a:t>ROW_NUMBER()</a:t>
+                      </a:r>
+                    </a:p>
+                  </a:txBody>
+                  <a:tcPr/>
+                </a:tc>
+                <a:tc>
+                  <a:txBody>
+                    <a:bodyPr/>
+                    <a:lstStyle/>
+                    <a:p>
+                      <a:r>
+                        <a:rPr lang="en-US" dirty="0"/>
+                        <a:t>Assigns a unique, sequential integer to rows (1, 2, 3, 4).</a:t>
+                      </a:r>
+                      <a:endParaRPr lang="en-IN" dirty="0"/>
+                    </a:p>
+                  </a:txBody>
+                  <a:tcPr/>
+                </a:tc>
+                <a:extLst>
+                  <a:ext uri="{0D108BD9-81ED-4DB2-BD59-A6C34878D82A}">
+                    <a16:rowId xmlns:a16="http://schemas.microsoft.com/office/drawing/2014/main" val="2600534790"/>
+                  </a:ext>
+                </a:extLst>
+              </a:tr>
+              <a:tr h="185420">
+                <a:tc>
+                  <a:txBody>
+                    <a:bodyPr/>
+                    <a:lstStyle/>
+                    <a:p>
+                      <a:r>
+                        <a:rPr lang="en-IN" b="1" dirty="0"/>
+                        <a:t>RANK()</a:t>
+                      </a:r>
+                    </a:p>
+                  </a:txBody>
+                  <a:tcPr/>
+                </a:tc>
+                <a:tc>
+                  <a:txBody>
+                    <a:bodyPr/>
+                    <a:lstStyle/>
+                    <a:p>
+                      <a:r>
+                        <a:rPr lang="en-US" dirty="0"/>
+                        <a:t>Assigns a rank with gaps (1, 2, 2, 4) if there are ties.</a:t>
+                      </a:r>
+                      <a:endParaRPr lang="en-IN" dirty="0"/>
+                    </a:p>
+                  </a:txBody>
+                  <a:tcPr/>
+                </a:tc>
+                <a:extLst>
+                  <a:ext uri="{0D108BD9-81ED-4DB2-BD59-A6C34878D82A}">
+                    <a16:rowId xmlns:a16="http://schemas.microsoft.com/office/drawing/2014/main" val="432065622"/>
+                  </a:ext>
+                </a:extLst>
+              </a:tr>
+              <a:tr h="185420">
+                <a:tc>
+                  <a:txBody>
+                    <a:bodyPr/>
+                    <a:lstStyle/>
+                    <a:p>
+                      <a:r>
+                        <a:rPr lang="en-IN" b="1" dirty="0"/>
+                        <a:t>DENSE_RANK()</a:t>
+                      </a:r>
+                    </a:p>
+                  </a:txBody>
+                  <a:tcPr/>
+                </a:tc>
+                <a:tc>
+                  <a:txBody>
+                    <a:bodyPr/>
+                    <a:lstStyle/>
+                    <a:p>
+                      <a:r>
+                        <a:rPr lang="en-US" dirty="0"/>
+                        <a:t>Assigns a rank without gaps (1, 2, 2, 3) if there are ties.</a:t>
+                      </a:r>
+                      <a:endParaRPr lang="en-IN" dirty="0"/>
+                    </a:p>
+                  </a:txBody>
+                  <a:tcPr/>
+                </a:tc>
+                <a:extLst>
+                  <a:ext uri="{0D108BD9-81ED-4DB2-BD59-A6C34878D82A}">
+                    <a16:rowId xmlns:a16="http://schemas.microsoft.com/office/drawing/2014/main" val="4253980597"/>
+                  </a:ext>
+                </a:extLst>
+              </a:tr>
+              <a:tr h="370840">
+                <a:tc>
+                  <a:txBody>
+                    <a:bodyPr/>
+                    <a:lstStyle/>
+                    <a:p>
+                      <a:r>
+                        <a:rPr lang="en-IN" b="1" dirty="0"/>
+                        <a:t>NTILE(n)</a:t>
+                      </a:r>
+                    </a:p>
+                  </a:txBody>
+                  <a:tcPr/>
+                </a:tc>
+                <a:tc>
+                  <a:txBody>
+                    <a:bodyPr/>
+                    <a:lstStyle/>
+                    <a:p>
+                      <a:pPr>
+                        <a:buNone/>
+                      </a:pPr>
+                      <a:r>
+                        <a:rPr lang="en-US" dirty="0">
+                          <a:effectLst/>
+                          <a:latin typeface="Google Sans Text"/>
+                        </a:rPr>
+                        <a:t>Divides the partition into n buckets and assigns a bucket number to each row.</a:t>
+                      </a:r>
+                    </a:p>
+                  </a:txBody>
+                  <a:tcPr anchor="ctr"/>
+                </a:tc>
+                <a:extLst>
+                  <a:ext uri="{0D108BD9-81ED-4DB2-BD59-A6C34878D82A}">
+                    <a16:rowId xmlns:a16="http://schemas.microsoft.com/office/drawing/2014/main" val="3978552006"/>
+                  </a:ext>
+                </a:extLst>
+              </a:tr>
+            </a:tbl>
+          </a:graphicData>
+        </a:graphic>
+      </p:graphicFrame>
+      <p:sp>
+        <p:nvSpPr>
+          <p:cNvPr id="6" name="TextBox 5">
+            <a:extLst>
+              <a:ext uri="{FF2B5EF4-FFF2-40B4-BE49-F238E27FC236}">
+                <a16:creationId xmlns:a16="http://schemas.microsoft.com/office/drawing/2014/main" id="{427970B1-243F-ABFA-9FF8-5E5C5335D8E5}"/>
+              </a:ext>
+            </a:extLst>
+          </p:cNvPr>
+          <p:cNvSpPr txBox="1"/>
+          <p:nvPr/>
+        </p:nvSpPr>
+        <p:spPr>
+          <a:xfrm>
+            <a:off x="2029835" y="1447800"/>
+            <a:ext cx="5703934" cy="923330"/>
+          </a:xfrm>
+          <a:prstGeom prst="rect">
+            <a:avLst/>
+          </a:prstGeom>
+          <a:noFill/>
+        </p:spPr>
+        <p:txBody>
+          <a:bodyPr wrap="none" rtlCol="0">
+            <a:spAutoFit/>
+          </a:bodyPr>
+          <a:lstStyle/>
+          <a:p>
+            <a:r>
+              <a:rPr lang="en-US" b="1" dirty="0"/>
+              <a:t>Ranking Functions</a:t>
+            </a:r>
+          </a:p>
+          <a:p>
+            <a:r>
+              <a:rPr lang="en-US" dirty="0"/>
+              <a:t>Used to assign a number or rank to rows within a partition.</a:t>
+            </a:r>
+          </a:p>
+          <a:p>
+            <a:endParaRPr lang="en-IN" dirty="0"/>
+          </a:p>
+        </p:txBody>
+      </p:sp>
+      <p:sp>
+        <p:nvSpPr>
+          <p:cNvPr id="7" name="TextBox 6">
+            <a:extLst>
+              <a:ext uri="{FF2B5EF4-FFF2-40B4-BE49-F238E27FC236}">
+                <a16:creationId xmlns:a16="http://schemas.microsoft.com/office/drawing/2014/main" id="{CD35C601-E08A-5BD2-FB4B-8EC049D57E78}"/>
+              </a:ext>
+            </a:extLst>
+          </p:cNvPr>
+          <p:cNvSpPr txBox="1"/>
+          <p:nvPr/>
+        </p:nvSpPr>
+        <p:spPr>
+          <a:xfrm>
+            <a:off x="2032333" y="4427180"/>
+            <a:ext cx="6006837" cy="646331"/>
+          </a:xfrm>
+          <a:prstGeom prst="rect">
+            <a:avLst/>
+          </a:prstGeom>
+          <a:noFill/>
+        </p:spPr>
+        <p:txBody>
+          <a:bodyPr wrap="none" rtlCol="0">
+            <a:spAutoFit/>
+          </a:bodyPr>
+          <a:lstStyle/>
+          <a:p>
+            <a:r>
+              <a:rPr lang="en-US" b="1" dirty="0"/>
+              <a:t>Value Functions</a:t>
+            </a:r>
+          </a:p>
+          <a:p>
+            <a:r>
+              <a:rPr lang="en-US" dirty="0"/>
+              <a:t>Used to access data from other rows without using a Self-Join.</a:t>
+            </a:r>
+          </a:p>
+        </p:txBody>
+      </p:sp>
+      <p:graphicFrame>
+        <p:nvGraphicFramePr>
+          <p:cNvPr id="8" name="Table 7">
+            <a:extLst>
+              <a:ext uri="{FF2B5EF4-FFF2-40B4-BE49-F238E27FC236}">
+                <a16:creationId xmlns:a16="http://schemas.microsoft.com/office/drawing/2014/main" id="{73CB6C3F-1C6C-D6F7-F328-7335D165C4A3}"/>
+              </a:ext>
+            </a:extLst>
+          </p:cNvPr>
+          <p:cNvGraphicFramePr>
+            <a:graphicFrameLocks noGrp="1"/>
+          </p:cNvGraphicFramePr>
+          <p:nvPr>
+            <p:extLst>
+              <p:ext uri="{D42A27DB-BD31-4B8C-83A1-F6EECF244321}">
+                <p14:modId xmlns:p14="http://schemas.microsoft.com/office/powerpoint/2010/main" val="2709798535"/>
+              </p:ext>
+            </p:extLst>
+          </p:nvPr>
+        </p:nvGraphicFramePr>
+        <p:xfrm>
+          <a:off x="2029835" y="4750345"/>
+          <a:ext cx="8128000" cy="2118360"/>
+        </p:xfrm>
+        <a:graphic>
+          <a:graphicData uri="http://schemas.openxmlformats.org/drawingml/2006/table">
+            <a:tbl>
+              <a:tblPr firstRow="1" bandRow="1">
+                <a:tableStyleId>{5C22544A-7EE6-4342-B048-85BDC9FD1C3A}</a:tableStyleId>
+              </a:tblPr>
+              <a:tblGrid>
+                <a:gridCol w="2557155">
+                  <a:extLst>
+                    <a:ext uri="{9D8B030D-6E8A-4147-A177-3AD203B41FA5}">
+                      <a16:colId xmlns:a16="http://schemas.microsoft.com/office/drawing/2014/main" val="4214551485"/>
+                    </a:ext>
+                  </a:extLst>
+                </a:gridCol>
+                <a:gridCol w="5570845">
+                  <a:extLst>
+                    <a:ext uri="{9D8B030D-6E8A-4147-A177-3AD203B41FA5}">
+                      <a16:colId xmlns:a16="http://schemas.microsoft.com/office/drawing/2014/main" val="458204844"/>
+                    </a:ext>
+                  </a:extLst>
+                </a:gridCol>
+              </a:tblGrid>
+              <a:tr h="370840">
+                <a:tc>
+                  <a:txBody>
+                    <a:bodyPr/>
+                    <a:lstStyle/>
+                    <a:p>
+                      <a:pPr>
+                        <a:buNone/>
+                      </a:pPr>
+                      <a:r>
+                        <a:rPr lang="en-IN" dirty="0"/>
+                        <a:t>Function</a:t>
+                      </a:r>
+                    </a:p>
+                  </a:txBody>
+                  <a:tcPr anchor="ctr"/>
+                </a:tc>
+                <a:tc>
+                  <a:txBody>
+                    <a:bodyPr/>
+                    <a:lstStyle/>
+                    <a:p>
+                      <a:pPr>
+                        <a:buNone/>
+                      </a:pPr>
+                      <a:r>
+                        <a:rPr lang="en-IN" dirty="0"/>
+                        <a:t>Description</a:t>
+                      </a:r>
+                    </a:p>
+                  </a:txBody>
+                  <a:tcPr anchor="ctr"/>
+                </a:tc>
+                <a:extLst>
+                  <a:ext uri="{0D108BD9-81ED-4DB2-BD59-A6C34878D82A}">
+                    <a16:rowId xmlns:a16="http://schemas.microsoft.com/office/drawing/2014/main" val="3511679844"/>
+                  </a:ext>
+                </a:extLst>
+              </a:tr>
+              <a:tr h="370840">
+                <a:tc>
+                  <a:txBody>
+                    <a:bodyPr/>
+                    <a:lstStyle/>
+                    <a:p>
+                      <a:r>
+                        <a:rPr lang="en-IN" b="1" dirty="0"/>
+                        <a:t>LAG(column, offset)</a:t>
+                      </a:r>
+                    </a:p>
+                  </a:txBody>
+                  <a:tcPr/>
+                </a:tc>
+                <a:tc>
+                  <a:txBody>
+                    <a:bodyPr/>
+                    <a:lstStyle/>
+                    <a:p>
+                      <a:r>
+                        <a:rPr lang="en-US" dirty="0"/>
+                        <a:t>Returns the value from a row "behind" the current row.</a:t>
+                      </a:r>
+                      <a:endParaRPr lang="en-IN" dirty="0"/>
+                    </a:p>
+                  </a:txBody>
+                  <a:tcPr/>
+                </a:tc>
+                <a:extLst>
+                  <a:ext uri="{0D108BD9-81ED-4DB2-BD59-A6C34878D82A}">
+                    <a16:rowId xmlns:a16="http://schemas.microsoft.com/office/drawing/2014/main" val="2600534790"/>
+                  </a:ext>
+                </a:extLst>
+              </a:tr>
+              <a:tr h="185420">
+                <a:tc>
+                  <a:txBody>
+                    <a:bodyPr/>
+                    <a:lstStyle/>
+                    <a:p>
+                      <a:r>
+                        <a:rPr lang="en-IN" b="1" dirty="0"/>
+                        <a:t>LEAD(column, offset)</a:t>
+                      </a:r>
+                    </a:p>
+                  </a:txBody>
+                  <a:tcPr/>
+                </a:tc>
+                <a:tc>
+                  <a:txBody>
+                    <a:bodyPr/>
+                    <a:lstStyle/>
+                    <a:p>
+                      <a:r>
+                        <a:rPr lang="en-US" dirty="0"/>
+                        <a:t>Returns the value from a row "ahead" of the current row.</a:t>
+                      </a:r>
+                      <a:endParaRPr lang="en-IN" dirty="0"/>
+                    </a:p>
+                  </a:txBody>
+                  <a:tcPr/>
+                </a:tc>
+                <a:extLst>
+                  <a:ext uri="{0D108BD9-81ED-4DB2-BD59-A6C34878D82A}">
+                    <a16:rowId xmlns:a16="http://schemas.microsoft.com/office/drawing/2014/main" val="432065622"/>
+                  </a:ext>
+                </a:extLst>
+              </a:tr>
+              <a:tr h="185420">
+                <a:tc>
+                  <a:txBody>
+                    <a:bodyPr/>
+                    <a:lstStyle/>
+                    <a:p>
+                      <a:r>
+                        <a:rPr lang="en-IN" b="1" dirty="0">
+                          <a:solidFill>
+                            <a:schemeClr val="dk1"/>
+                          </a:solidFill>
+                          <a:latin typeface="+mn-lt"/>
+                          <a:ea typeface="+mn-ea"/>
+                          <a:cs typeface="+mn-cs"/>
+                        </a:rPr>
+                        <a:t>FIRST_VALUE()</a:t>
+                      </a:r>
+                      <a:r>
+                        <a:rPr lang="en-IN" b="1" dirty="0"/>
+                        <a:t> / </a:t>
+                      </a:r>
+                      <a:r>
+                        <a:rPr lang="en-IN" b="1" dirty="0">
+                          <a:solidFill>
+                            <a:schemeClr val="dk1"/>
+                          </a:solidFill>
+                          <a:latin typeface="+mn-lt"/>
+                          <a:ea typeface="+mn-ea"/>
+                          <a:cs typeface="+mn-cs"/>
+                        </a:rPr>
+                        <a:t>LAST_VALUE()</a:t>
+                      </a:r>
+                      <a:endParaRPr lang="en-IN" b="1" dirty="0"/>
+                    </a:p>
+                  </a:txBody>
+                  <a:tcPr/>
+                </a:tc>
+                <a:tc>
+                  <a:txBody>
+                    <a:bodyPr/>
+                    <a:lstStyle/>
+                    <a:p>
+                      <a:r>
+                        <a:rPr lang="en-US" dirty="0"/>
+                        <a:t>Returns the value from the first or last row of the window frame.</a:t>
+                      </a:r>
+                      <a:endParaRPr lang="en-IN" dirty="0"/>
+                    </a:p>
+                  </a:txBody>
+                  <a:tcPr/>
+                </a:tc>
+                <a:extLst>
+                  <a:ext uri="{0D108BD9-81ED-4DB2-BD59-A6C34878D82A}">
+                    <a16:rowId xmlns:a16="http://schemas.microsoft.com/office/drawing/2014/main" val="4253980597"/>
+                  </a:ext>
+                </a:extLst>
+              </a:tr>
+              <a:tr h="370840">
+                <a:tc>
+                  <a:txBody>
+                    <a:bodyPr/>
+                    <a:lstStyle/>
+                    <a:p>
+                      <a:endParaRPr lang="en-IN" b="1" dirty="0"/>
+                    </a:p>
+                  </a:txBody>
+                  <a:tcPr/>
+                </a:tc>
+                <a:tc>
+                  <a:txBody>
+                    <a:bodyPr/>
+                    <a:lstStyle/>
+                    <a:p>
+                      <a:pPr>
+                        <a:buNone/>
+                      </a:pPr>
+                      <a:endParaRPr lang="en-US" dirty="0">
+                        <a:effectLst/>
+                        <a:latin typeface="Google Sans Text"/>
+                      </a:endParaRPr>
+                    </a:p>
+                  </a:txBody>
+                  <a:tcPr anchor="ctr"/>
+                </a:tc>
+                <a:extLst>
+                  <a:ext uri="{0D108BD9-81ED-4DB2-BD59-A6C34878D82A}">
+                    <a16:rowId xmlns:a16="http://schemas.microsoft.com/office/drawing/2014/main" val="3978552006"/>
+                  </a:ext>
+                </a:extLst>
+              </a:tr>
+            </a:tbl>
+          </a:graphicData>
+        </a:graphic>
+      </p:graphicFrame>
+    </p:spTree>
+    <p:extLst>
+      <p:ext uri="{BB962C8B-B14F-4D97-AF65-F5344CB8AC3E}">
+        <p14:creationId xmlns:p14="http://schemas.microsoft.com/office/powerpoint/2010/main" val="3613632964"/>
+      </p:ext>
+    </p:extLst>
+  </p:cSld>
+  <p:clrMapOvr>
+    <a:masterClrMapping/>
+  </p:clrMapOvr>
+</p:sld>
+</file>
+
+<file path=ppt/slides/slide29.xml><?xml version="1.0" encoding="utf-8"?>
+<p:sld xmlns:a="http://schemas.openxmlformats.org/drawingml/2006/main" xmlns:r="http://schemas.openxmlformats.org/officeDocument/2006/relationships" xmlns:p="http://schemas.openxmlformats.org/presentationml/2006/main">
+  <p:cSld>
+    <p:spTree>
+      <p:nvGrpSpPr>
+        <p:cNvPr id="1" name="">
+          <a:extLst>
+            <a:ext uri="{FF2B5EF4-FFF2-40B4-BE49-F238E27FC236}">
+              <a16:creationId xmlns:a16="http://schemas.microsoft.com/office/drawing/2014/main" id="{BD4E1515-EABA-2AE6-7A60-D301041A2641}"/>
+            </a:ext>
+          </a:extLst>
+        </p:cNvPr>
+        <p:cNvGrpSpPr/>
+        <p:nvPr/>
+      </p:nvGrpSpPr>
+      <p:grpSpPr>
+        <a:xfrm>
+          <a:off x="0" y="0"/>
+          <a:ext cx="0" cy="0"/>
+          <a:chOff x="0" y="0"/>
+          <a:chExt cx="0" cy="0"/>
+        </a:xfrm>
+      </p:grpSpPr>
+      <p:sp>
+        <p:nvSpPr>
+          <p:cNvPr id="2" name="Title 1">
+            <a:extLst>
+              <a:ext uri="{FF2B5EF4-FFF2-40B4-BE49-F238E27FC236}">
+                <a16:creationId xmlns:a16="http://schemas.microsoft.com/office/drawing/2014/main" id="{056BF5FD-D773-6C75-77FC-1AF17D3E3320}"/>
+              </a:ext>
+            </a:extLst>
+          </p:cNvPr>
+          <p:cNvSpPr>
+            <a:spLocks noGrp="1"/>
+          </p:cNvSpPr>
+          <p:nvPr>
+            <p:ph type="title"/>
+          </p:nvPr>
+        </p:nvSpPr>
+        <p:spPr>
+          <a:xfrm>
+            <a:off x="1524000" y="205742"/>
+            <a:ext cx="9739251" cy="574039"/>
+          </a:xfrm>
+        </p:spPr>
+        <p:txBody>
+          <a:bodyPr/>
+          <a:lstStyle/>
+          <a:p>
+            <a:pPr algn="ctr"/>
+            <a:r>
+              <a:rPr lang="en-US" dirty="0">
+                <a:solidFill>
+                  <a:schemeClr val="tx1"/>
+                </a:solidFill>
+              </a:rPr>
+              <a:t>The Window Frame (ROWS &amp; RANGE)</a:t>
+            </a:r>
+            <a:endParaRPr lang="en-IN" dirty="0">
+              <a:solidFill>
+                <a:schemeClr val="tx1"/>
+              </a:solidFill>
+            </a:endParaRPr>
+          </a:p>
+        </p:txBody>
+      </p:sp>
+      <p:sp>
+        <p:nvSpPr>
+          <p:cNvPr id="4" name="Slide Number Placeholder 3">
+            <a:extLst>
+              <a:ext uri="{FF2B5EF4-FFF2-40B4-BE49-F238E27FC236}">
+                <a16:creationId xmlns:a16="http://schemas.microsoft.com/office/drawing/2014/main" id="{3A81CF21-52C6-317F-C539-4F7B97418FEC}"/>
+              </a:ext>
+            </a:extLst>
+          </p:cNvPr>
+          <p:cNvSpPr>
+            <a:spLocks noGrp="1"/>
+          </p:cNvSpPr>
+          <p:nvPr>
+            <p:ph type="sldNum" sz="quarter" idx="7"/>
+          </p:nvPr>
+        </p:nvSpPr>
+        <p:spPr/>
+        <p:txBody>
+          <a:bodyPr/>
+          <a:lstStyle/>
+          <a:p>
+            <a:fld id="{B6F15528-21DE-4FAA-801E-634DDDAF4B2B}" type="slidenum">
+              <a:rPr lang="en-IN" smtClean="0"/>
+              <a:t>29</a:t>
+            </a:fld>
+            <a:endParaRPr lang="en-IN"/>
+          </a:p>
+        </p:txBody>
+      </p:sp>
+      <p:graphicFrame>
+        <p:nvGraphicFramePr>
+          <p:cNvPr id="5" name="Table 4">
+            <a:extLst>
+              <a:ext uri="{FF2B5EF4-FFF2-40B4-BE49-F238E27FC236}">
+                <a16:creationId xmlns:a16="http://schemas.microsoft.com/office/drawing/2014/main" id="{D8A59CDD-403F-9494-7221-9FEE99F7C51E}"/>
+              </a:ext>
+            </a:extLst>
+          </p:cNvPr>
+          <p:cNvGraphicFramePr>
+            <a:graphicFrameLocks noGrp="1"/>
+          </p:cNvGraphicFramePr>
+          <p:nvPr>
+            <p:extLst>
+              <p:ext uri="{D42A27DB-BD31-4B8C-83A1-F6EECF244321}">
+                <p14:modId xmlns:p14="http://schemas.microsoft.com/office/powerpoint/2010/main" val="65092993"/>
+              </p:ext>
+            </p:extLst>
+          </p:nvPr>
+        </p:nvGraphicFramePr>
+        <p:xfrm>
+          <a:off x="2029835" y="1708423"/>
+          <a:ext cx="8128000" cy="2661920"/>
+        </p:xfrm>
+        <a:graphic>
+          <a:graphicData uri="http://schemas.openxmlformats.org/drawingml/2006/table">
+            <a:tbl>
+              <a:tblPr firstRow="1" bandRow="1">
+                <a:tableStyleId>{5C22544A-7EE6-4342-B048-85BDC9FD1C3A}</a:tableStyleId>
+              </a:tblPr>
+              <a:tblGrid>
+                <a:gridCol w="3380365">
+                  <a:extLst>
+                    <a:ext uri="{9D8B030D-6E8A-4147-A177-3AD203B41FA5}">
+                      <a16:colId xmlns:a16="http://schemas.microsoft.com/office/drawing/2014/main" val="4214551485"/>
+                    </a:ext>
+                  </a:extLst>
+                </a:gridCol>
+                <a:gridCol w="4747635">
+                  <a:extLst>
+                    <a:ext uri="{9D8B030D-6E8A-4147-A177-3AD203B41FA5}">
+                      <a16:colId xmlns:a16="http://schemas.microsoft.com/office/drawing/2014/main" val="458204844"/>
+                    </a:ext>
+                  </a:extLst>
+                </a:gridCol>
+              </a:tblGrid>
+              <a:tr h="370840">
+                <a:tc>
+                  <a:txBody>
+                    <a:bodyPr/>
+                    <a:lstStyle/>
+                    <a:p>
+                      <a:pPr>
+                        <a:buNone/>
+                      </a:pPr>
+                      <a:r>
+                        <a:rPr lang="en-IN"/>
+                        <a:t>Function</a:t>
+                      </a:r>
+                      <a:endParaRPr lang="en-IN" dirty="0"/>
+                    </a:p>
+                  </a:txBody>
+                  <a:tcPr anchor="ctr"/>
+                </a:tc>
+                <a:tc>
+                  <a:txBody>
+                    <a:bodyPr/>
+                    <a:lstStyle/>
+                    <a:p>
+                      <a:pPr>
+                        <a:buNone/>
+                      </a:pPr>
+                      <a:r>
+                        <a:rPr lang="en-IN"/>
+                        <a:t>Description</a:t>
+                      </a:r>
+                      <a:endParaRPr lang="en-IN" dirty="0"/>
+                    </a:p>
+                  </a:txBody>
+                  <a:tcPr anchor="ctr"/>
+                </a:tc>
+                <a:extLst>
+                  <a:ext uri="{0D108BD9-81ED-4DB2-BD59-A6C34878D82A}">
+                    <a16:rowId xmlns:a16="http://schemas.microsoft.com/office/drawing/2014/main" val="3511679844"/>
+                  </a:ext>
+                </a:extLst>
+              </a:tr>
+              <a:tr h="370840">
+                <a:tc>
+                  <a:txBody>
+                    <a:bodyPr/>
+                    <a:lstStyle/>
+                    <a:p>
+                      <a:r>
+                        <a:rPr lang="en-US"/>
+                        <a:t>ROWS BETWEEN UNBOUNDED PRECEDING AND CURRENT ROW</a:t>
+                      </a:r>
+                      <a:endParaRPr lang="en-IN" b="1" dirty="0"/>
+                    </a:p>
+                  </a:txBody>
+                  <a:tcPr/>
+                </a:tc>
+                <a:tc>
+                  <a:txBody>
+                    <a:bodyPr/>
+                    <a:lstStyle/>
+                    <a:p>
+                      <a:r>
+                        <a:rPr lang="en-US" dirty="0"/>
+                        <a:t>From the start of the partition to the current row (Default for </a:t>
+                      </a:r>
+                      <a:r>
+                        <a:rPr lang="en-US" dirty="0">
+                          <a:solidFill>
+                            <a:schemeClr val="dk1"/>
+                          </a:solidFill>
+                          <a:latin typeface="+mn-lt"/>
+                          <a:ea typeface="+mn-ea"/>
+                          <a:cs typeface="+mn-cs"/>
+                        </a:rPr>
+                        <a:t>ORDER BY</a:t>
+                      </a:r>
+                      <a:r>
+                        <a:rPr lang="en-US" dirty="0"/>
+                        <a:t>).</a:t>
+                      </a:r>
+                      <a:endParaRPr lang="en-IN" dirty="0"/>
+                    </a:p>
+                  </a:txBody>
+                  <a:tcPr/>
+                </a:tc>
+                <a:extLst>
+                  <a:ext uri="{0D108BD9-81ED-4DB2-BD59-A6C34878D82A}">
+                    <a16:rowId xmlns:a16="http://schemas.microsoft.com/office/drawing/2014/main" val="2600534790"/>
+                  </a:ext>
+                </a:extLst>
+              </a:tr>
+              <a:tr h="185420">
+                <a:tc>
+                  <a:txBody>
+                    <a:bodyPr/>
+                    <a:lstStyle/>
+                    <a:p>
+                      <a:r>
+                        <a:rPr lang="en-US" dirty="0"/>
+                        <a:t>ROWS BETWEEN 3 PRECEDING AND CURRENT ROW</a:t>
+                      </a:r>
+                      <a:endParaRPr lang="en-IN" b="1" dirty="0"/>
+                    </a:p>
+                  </a:txBody>
+                  <a:tcPr/>
+                </a:tc>
+                <a:tc>
+                  <a:txBody>
+                    <a:bodyPr/>
+                    <a:lstStyle/>
+                    <a:p>
+                      <a:r>
+                        <a:rPr lang="en-US" dirty="0"/>
+                        <a:t>The current row plus the three rows immediately above it.</a:t>
+                      </a:r>
+                      <a:endParaRPr lang="en-IN" dirty="0"/>
+                    </a:p>
+                  </a:txBody>
+                  <a:tcPr/>
+                </a:tc>
+                <a:extLst>
+                  <a:ext uri="{0D108BD9-81ED-4DB2-BD59-A6C34878D82A}">
+                    <a16:rowId xmlns:a16="http://schemas.microsoft.com/office/drawing/2014/main" val="432065622"/>
+                  </a:ext>
+                </a:extLst>
+              </a:tr>
+              <a:tr h="185420">
+                <a:tc>
+                  <a:txBody>
+                    <a:bodyPr/>
+                    <a:lstStyle/>
+                    <a:p>
+                      <a:r>
+                        <a:rPr lang="en-US" dirty="0"/>
+                        <a:t>ROWS BETWEEN CURRENT ROW AND UNBOUNDED FOLLOWING</a:t>
+                      </a:r>
+                      <a:endParaRPr lang="en-IN" b="1" dirty="0"/>
+                    </a:p>
+                  </a:txBody>
+                  <a:tcPr/>
+                </a:tc>
+                <a:tc>
+                  <a:txBody>
+                    <a:bodyPr/>
+                    <a:lstStyle/>
+                    <a:p>
+                      <a:r>
+                        <a:rPr lang="en-US" dirty="0"/>
+                        <a:t>From the current row to the end of the partition.</a:t>
+                      </a:r>
+                      <a:endParaRPr lang="en-IN" dirty="0"/>
+                    </a:p>
+                  </a:txBody>
+                  <a:tcPr/>
+                </a:tc>
+                <a:extLst>
+                  <a:ext uri="{0D108BD9-81ED-4DB2-BD59-A6C34878D82A}">
+                    <a16:rowId xmlns:a16="http://schemas.microsoft.com/office/drawing/2014/main" val="4253980597"/>
+                  </a:ext>
+                </a:extLst>
+              </a:tr>
+              <a:tr h="370840">
+                <a:tc>
+                  <a:txBody>
+                    <a:bodyPr/>
+                    <a:lstStyle/>
+                    <a:p>
+                      <a:endParaRPr lang="en-IN" b="1" dirty="0"/>
+                    </a:p>
+                  </a:txBody>
+                  <a:tcPr/>
+                </a:tc>
+                <a:tc>
+                  <a:txBody>
+                    <a:bodyPr/>
+                    <a:lstStyle/>
+                    <a:p>
+                      <a:pPr>
+                        <a:buNone/>
+                      </a:pPr>
+                      <a:endParaRPr lang="en-US" dirty="0">
+                        <a:effectLst/>
+                        <a:latin typeface="Google Sans Text"/>
+                      </a:endParaRPr>
+                    </a:p>
+                  </a:txBody>
+                  <a:tcPr anchor="ctr"/>
+                </a:tc>
+                <a:extLst>
+                  <a:ext uri="{0D108BD9-81ED-4DB2-BD59-A6C34878D82A}">
+                    <a16:rowId xmlns:a16="http://schemas.microsoft.com/office/drawing/2014/main" val="3978552006"/>
+                  </a:ext>
+                </a:extLst>
+              </a:tr>
+            </a:tbl>
+          </a:graphicData>
+        </a:graphic>
+      </p:graphicFrame>
+      <p:sp>
+        <p:nvSpPr>
+          <p:cNvPr id="6" name="TextBox 5">
+            <a:extLst>
+              <a:ext uri="{FF2B5EF4-FFF2-40B4-BE49-F238E27FC236}">
+                <a16:creationId xmlns:a16="http://schemas.microsoft.com/office/drawing/2014/main" id="{DD1A229C-1F32-B25A-2357-795719227767}"/>
+              </a:ext>
+            </a:extLst>
+          </p:cNvPr>
+          <p:cNvSpPr txBox="1"/>
+          <p:nvPr/>
+        </p:nvSpPr>
+        <p:spPr>
+          <a:xfrm>
+            <a:off x="4661551" y="1207046"/>
+            <a:ext cx="2864567" cy="369332"/>
+          </a:xfrm>
+          <a:prstGeom prst="rect">
+            <a:avLst/>
+          </a:prstGeom>
+          <a:noFill/>
+        </p:spPr>
+        <p:txBody>
+          <a:bodyPr wrap="none" rtlCol="0">
+            <a:spAutoFit/>
+          </a:bodyPr>
+          <a:lstStyle/>
+          <a:p>
+            <a:r>
+              <a:rPr lang="en-IN" b="1" dirty="0"/>
+              <a:t>Common Frame Definitions:</a:t>
+            </a:r>
           </a:p>
         </p:txBody>
       </p:sp>
     </p:spTree>
+    <p:extLst>
+      <p:ext uri="{BB962C8B-B14F-4D97-AF65-F5344CB8AC3E}">
+        <p14:creationId xmlns:p14="http://schemas.microsoft.com/office/powerpoint/2010/main" val="3220246047"/>
+      </p:ext>
+    </p:extLst>
   </p:cSld>
   <p:clrMapOvr>
     <a:masterClrMapping/>
@@ -19353,6 +20446,1943 @@
             <a:fld id="{B6F15528-21DE-4FAA-801E-634DDDAF4B2B}" type="slidenum">
               <a:rPr/>
               <a:t>3</a:t>
+            </a:fld>
+            <a:endParaRPr/>
+          </a:p>
+        </p:txBody>
+      </p:sp>
+    </p:spTree>
+  </p:cSld>
+  <p:clrMapOvr>
+    <a:masterClrMapping/>
+  </p:clrMapOvr>
+</p:sld>
+</file>
+
+<file path=ppt/slides/slide30.xml><?xml version="1.0" encoding="utf-8"?>
+<p:sld xmlns:a="http://schemas.openxmlformats.org/drawingml/2006/main" xmlns:r="http://schemas.openxmlformats.org/officeDocument/2006/relationships" xmlns:p="http://schemas.openxmlformats.org/presentationml/2006/main">
+  <p:cSld>
+    <p:spTree>
+      <p:nvGrpSpPr>
+        <p:cNvPr id="1" name="">
+          <a:extLst>
+            <a:ext uri="{FF2B5EF4-FFF2-40B4-BE49-F238E27FC236}">
+              <a16:creationId xmlns:a16="http://schemas.microsoft.com/office/drawing/2014/main" id="{8DDEFC64-2F8A-9346-179E-5B0FF73C5D56}"/>
+            </a:ext>
+          </a:extLst>
+        </p:cNvPr>
+        <p:cNvGrpSpPr/>
+        <p:nvPr/>
+      </p:nvGrpSpPr>
+      <p:grpSpPr>
+        <a:xfrm>
+          <a:off x="0" y="0"/>
+          <a:ext cx="0" cy="0"/>
+          <a:chOff x="0" y="0"/>
+          <a:chExt cx="0" cy="0"/>
+        </a:xfrm>
+      </p:grpSpPr>
+      <p:sp>
+        <p:nvSpPr>
+          <p:cNvPr id="2" name="object 2">
+            <a:extLst>
+              <a:ext uri="{FF2B5EF4-FFF2-40B4-BE49-F238E27FC236}">
+                <a16:creationId xmlns:a16="http://schemas.microsoft.com/office/drawing/2014/main" id="{E56D7FAF-42A0-83F9-93C2-5C2A4E3F03F0}"/>
+              </a:ext>
+            </a:extLst>
+          </p:cNvPr>
+          <p:cNvSpPr/>
+          <p:nvPr/>
+        </p:nvSpPr>
+        <p:spPr>
+          <a:xfrm flipH="1">
+            <a:off x="6096379" y="898063"/>
+            <a:ext cx="48451" cy="5510483"/>
+          </a:xfrm>
+          <a:custGeom>
+            <a:avLst/>
+            <a:gdLst/>
+            <a:ahLst/>
+            <a:cxnLst/>
+            <a:rect l="l" t="t" r="r" b="b"/>
+            <a:pathLst>
+              <a:path h="4645660">
+                <a:moveTo>
+                  <a:pt x="0" y="0"/>
+                </a:moveTo>
+                <a:lnTo>
+                  <a:pt x="0" y="4645482"/>
+                </a:lnTo>
+              </a:path>
+            </a:pathLst>
+          </a:custGeom>
+          <a:ln w="25146">
+            <a:solidFill>
+              <a:srgbClr val="EF5A28"/>
+            </a:solidFill>
+          </a:ln>
+        </p:spPr>
+        <p:txBody>
+          <a:bodyPr wrap="square" lIns="0" tIns="0" rIns="0" bIns="0" rtlCol="0"/>
+          <a:lstStyle/>
+          <a:p>
+            <a:endParaRPr/>
+          </a:p>
+        </p:txBody>
+      </p:sp>
+      <p:sp>
+        <p:nvSpPr>
+          <p:cNvPr id="5" name="object 5">
+            <a:extLst>
+              <a:ext uri="{FF2B5EF4-FFF2-40B4-BE49-F238E27FC236}">
+                <a16:creationId xmlns:a16="http://schemas.microsoft.com/office/drawing/2014/main" id="{266C9650-448D-FDFB-AD67-65655E1E4759}"/>
+              </a:ext>
+            </a:extLst>
+          </p:cNvPr>
+          <p:cNvSpPr txBox="1"/>
+          <p:nvPr/>
+        </p:nvSpPr>
+        <p:spPr>
+          <a:xfrm>
+            <a:off x="6299806" y="2007819"/>
+            <a:ext cx="5691343" cy="2782813"/>
+          </a:xfrm>
+          <a:prstGeom prst="rect">
+            <a:avLst/>
+          </a:prstGeom>
+        </p:spPr>
+        <p:txBody>
+          <a:bodyPr vert="horz" wrap="square" lIns="0" tIns="12700" rIns="0" bIns="0" rtlCol="0">
+            <a:spAutoFit/>
+          </a:bodyPr>
+          <a:lstStyle/>
+          <a:p>
+            <a:r>
+              <a:rPr lang="en-US" sz="2000" spc="30" dirty="0">
+                <a:solidFill>
+                  <a:srgbClr val="2A9FBB"/>
+                </a:solidFill>
+                <a:latin typeface="Verdana" panose="020B0604030504040204"/>
+              </a:rPr>
+              <a:t>PARTITION BY region: The calculation resets every time the region changes.</a:t>
+            </a:r>
+          </a:p>
+          <a:p>
+            <a:endParaRPr lang="en-US" sz="2000" spc="30" dirty="0">
+              <a:solidFill>
+                <a:srgbClr val="2A9FBB"/>
+              </a:solidFill>
+              <a:latin typeface="Verdana" panose="020B0604030504040204"/>
+            </a:endParaRPr>
+          </a:p>
+          <a:p>
+            <a:r>
+              <a:rPr lang="en-US" sz="2000" spc="30" dirty="0">
+                <a:solidFill>
+                  <a:srgbClr val="2A9FBB"/>
+                </a:solidFill>
+                <a:latin typeface="Verdana" panose="020B0604030504040204"/>
+              </a:rPr>
+              <a:t>ORDER BY </a:t>
+            </a:r>
+            <a:r>
+              <a:rPr lang="en-US" sz="2000" spc="30" dirty="0" err="1">
+                <a:solidFill>
+                  <a:srgbClr val="2A9FBB"/>
+                </a:solidFill>
+                <a:latin typeface="Verdana" panose="020B0604030504040204"/>
+              </a:rPr>
+              <a:t>sale_date</a:t>
+            </a:r>
+            <a:r>
+              <a:rPr lang="en-US" sz="2000" spc="30" dirty="0">
+                <a:solidFill>
+                  <a:srgbClr val="2A9FBB"/>
+                </a:solidFill>
+                <a:latin typeface="Verdana" panose="020B0604030504040204"/>
+              </a:rPr>
+              <a:t>: Ensures the sum is added chronologically.</a:t>
+            </a:r>
+          </a:p>
+          <a:p>
+            <a:endParaRPr lang="en-US" sz="2000" spc="30" dirty="0">
+              <a:solidFill>
+                <a:srgbClr val="2A9FBB"/>
+              </a:solidFill>
+              <a:latin typeface="Verdana" panose="020B0604030504040204"/>
+            </a:endParaRPr>
+          </a:p>
+          <a:p>
+            <a:r>
+              <a:rPr lang="en-US" sz="2000" spc="30" dirty="0">
+                <a:solidFill>
+                  <a:srgbClr val="2A9FBB"/>
+                </a:solidFill>
+                <a:latin typeface="Verdana" panose="020B0604030504040204"/>
+              </a:rPr>
+              <a:t>The Result: Each row shows its specific amount plus the sum of all previous amount values in that region.</a:t>
+            </a:r>
+          </a:p>
+        </p:txBody>
+      </p:sp>
+      <p:sp>
+        <p:nvSpPr>
+          <p:cNvPr id="7" name="object 7">
+            <a:extLst>
+              <a:ext uri="{FF2B5EF4-FFF2-40B4-BE49-F238E27FC236}">
+                <a16:creationId xmlns:a16="http://schemas.microsoft.com/office/drawing/2014/main" id="{60ED7557-DF28-9223-8290-6A0546F2E532}"/>
+              </a:ext>
+            </a:extLst>
+          </p:cNvPr>
+          <p:cNvSpPr txBox="1">
+            <a:spLocks noGrp="1"/>
+          </p:cNvSpPr>
+          <p:nvPr>
+            <p:ph type="title"/>
+          </p:nvPr>
+        </p:nvSpPr>
+        <p:spPr>
+          <a:xfrm>
+            <a:off x="1690164" y="137160"/>
+            <a:ext cx="9892236" cy="566822"/>
+          </a:xfrm>
+          <a:prstGeom prst="rect">
+            <a:avLst/>
+          </a:prstGeom>
+        </p:spPr>
+        <p:txBody>
+          <a:bodyPr vert="horz" wrap="square" lIns="0" tIns="12700" rIns="0" bIns="0" rtlCol="0">
+            <a:spAutoFit/>
+          </a:bodyPr>
+          <a:lstStyle/>
+          <a:p>
+            <a:pPr marL="12700" algn="ctr">
+              <a:lnSpc>
+                <a:spcPct val="100000"/>
+              </a:lnSpc>
+              <a:spcBef>
+                <a:spcPts val="100"/>
+              </a:spcBef>
+            </a:pPr>
+            <a:r>
+              <a:rPr lang="en-IN" dirty="0">
+                <a:solidFill>
+                  <a:schemeClr val="tx1"/>
+                </a:solidFill>
+              </a:rPr>
+              <a:t>Practical Example: Running Total</a:t>
+            </a:r>
+            <a:endParaRPr spc="25" dirty="0">
+              <a:solidFill>
+                <a:schemeClr val="tx1"/>
+              </a:solidFill>
+            </a:endParaRPr>
+          </a:p>
+        </p:txBody>
+      </p:sp>
+      <p:sp>
+        <p:nvSpPr>
+          <p:cNvPr id="9" name="Slide Number Placeholder 8">
+            <a:extLst>
+              <a:ext uri="{FF2B5EF4-FFF2-40B4-BE49-F238E27FC236}">
+                <a16:creationId xmlns:a16="http://schemas.microsoft.com/office/drawing/2014/main" id="{9DBAE656-E7AA-97F7-858C-D3D98CE03EB0}"/>
+              </a:ext>
+            </a:extLst>
+          </p:cNvPr>
+          <p:cNvSpPr>
+            <a:spLocks noGrp="1"/>
+          </p:cNvSpPr>
+          <p:nvPr>
+            <p:ph type="sldNum" sz="quarter" idx="7"/>
+          </p:nvPr>
+        </p:nvSpPr>
+        <p:spPr/>
+        <p:txBody>
+          <a:bodyPr/>
+          <a:lstStyle/>
+          <a:p>
+            <a:fld id="{B6F15528-21DE-4FAA-801E-634DDDAF4B2B}" type="slidenum">
+              <a:rPr/>
+              <a:t>30</a:t>
+            </a:fld>
+            <a:endParaRPr/>
+          </a:p>
+        </p:txBody>
+      </p:sp>
+      <p:sp>
+        <p:nvSpPr>
+          <p:cNvPr id="8" name="object 8">
+            <a:extLst>
+              <a:ext uri="{FF2B5EF4-FFF2-40B4-BE49-F238E27FC236}">
+                <a16:creationId xmlns:a16="http://schemas.microsoft.com/office/drawing/2014/main" id="{28ADDF94-524A-9FCF-4983-EBF15AACFBAF}"/>
+              </a:ext>
+            </a:extLst>
+          </p:cNvPr>
+          <p:cNvSpPr txBox="1"/>
+          <p:nvPr/>
+        </p:nvSpPr>
+        <p:spPr>
+          <a:xfrm>
+            <a:off x="148652" y="1210806"/>
+            <a:ext cx="5898519" cy="5510483"/>
+          </a:xfrm>
+          <a:prstGeom prst="rect">
+            <a:avLst/>
+          </a:prstGeom>
+          <a:solidFill>
+            <a:srgbClr val="EF5A28"/>
+          </a:solidFill>
+        </p:spPr>
+        <p:txBody>
+          <a:bodyPr vert="horz" wrap="square" lIns="0" tIns="234950" rIns="0" bIns="0" rtlCol="0">
+            <a:spAutoFit/>
+          </a:bodyPr>
+          <a:lstStyle/>
+          <a:p>
+            <a:pPr marL="322580" marR="314325" indent="-1905">
+              <a:spcBef>
+                <a:spcPts val="1850"/>
+              </a:spcBef>
+            </a:pPr>
+            <a:r>
+              <a:rPr lang="en-US" sz="2400" b="1" dirty="0"/>
+              <a:t>SELECT </a:t>
+            </a:r>
+          </a:p>
+          <a:p>
+            <a:pPr marL="322580" marR="314325" indent="-1905">
+              <a:spcBef>
+                <a:spcPts val="1850"/>
+              </a:spcBef>
+            </a:pPr>
+            <a:r>
+              <a:rPr lang="en-US" sz="2400" b="1" dirty="0"/>
+              <a:t>    region,</a:t>
+            </a:r>
+          </a:p>
+          <a:p>
+            <a:pPr marL="322580" marR="314325" indent="-1905">
+              <a:spcBef>
+                <a:spcPts val="1850"/>
+              </a:spcBef>
+            </a:pPr>
+            <a:r>
+              <a:rPr lang="en-US" sz="2400" b="1" dirty="0"/>
+              <a:t>    </a:t>
+            </a:r>
+            <a:r>
+              <a:rPr lang="en-US" sz="2400" b="1" dirty="0" err="1"/>
+              <a:t>sale_date</a:t>
+            </a:r>
+            <a:r>
+              <a:rPr lang="en-US" sz="2400" b="1" dirty="0"/>
+              <a:t>,</a:t>
+            </a:r>
+          </a:p>
+          <a:p>
+            <a:pPr marL="322580" marR="314325" indent="-1905">
+              <a:spcBef>
+                <a:spcPts val="1850"/>
+              </a:spcBef>
+            </a:pPr>
+            <a:r>
+              <a:rPr lang="en-US" sz="2400" b="1" dirty="0"/>
+              <a:t>    amount,</a:t>
+            </a:r>
+          </a:p>
+          <a:p>
+            <a:pPr marL="322580" marR="314325" indent="-1905">
+              <a:spcBef>
+                <a:spcPts val="1850"/>
+              </a:spcBef>
+            </a:pPr>
+            <a:r>
+              <a:rPr lang="en-US" sz="2400" b="1" dirty="0"/>
+              <a:t>    SUM(amount) OVER (</a:t>
+            </a:r>
+          </a:p>
+          <a:p>
+            <a:pPr marL="322580" marR="314325" indent="-1905">
+              <a:spcBef>
+                <a:spcPts val="1850"/>
+              </a:spcBef>
+            </a:pPr>
+            <a:r>
+              <a:rPr lang="en-US" sz="2400" b="1" dirty="0"/>
+              <a:t>        PARTITION BY region </a:t>
+            </a:r>
+          </a:p>
+          <a:p>
+            <a:pPr marL="322580" marR="314325" indent="-1905">
+              <a:spcBef>
+                <a:spcPts val="1850"/>
+              </a:spcBef>
+            </a:pPr>
+            <a:r>
+              <a:rPr lang="en-US" sz="2400" b="1" dirty="0"/>
+              <a:t>        ORDER BY </a:t>
+            </a:r>
+            <a:r>
+              <a:rPr lang="en-US" sz="2400" b="1" dirty="0" err="1"/>
+              <a:t>sale_date</a:t>
+            </a:r>
+            <a:endParaRPr lang="en-US" sz="2400" b="1" dirty="0"/>
+          </a:p>
+          <a:p>
+            <a:pPr marL="322580" marR="314325" indent="-1905">
+              <a:spcBef>
+                <a:spcPts val="1850"/>
+              </a:spcBef>
+            </a:pPr>
+            <a:r>
+              <a:rPr lang="en-US" sz="2400" b="1" dirty="0"/>
+              <a:t>    ) AS </a:t>
+            </a:r>
+            <a:r>
+              <a:rPr lang="en-US" sz="2400" b="1" dirty="0" err="1"/>
+              <a:t>running_total</a:t>
+            </a:r>
+            <a:endParaRPr lang="en-US" sz="2400" b="1" dirty="0"/>
+          </a:p>
+          <a:p>
+            <a:pPr marL="322580" marR="314325" indent="-1905">
+              <a:spcBef>
+                <a:spcPts val="1850"/>
+              </a:spcBef>
+            </a:pPr>
+            <a:r>
+              <a:rPr lang="en-US" sz="2400" b="1" dirty="0"/>
+              <a:t>FROM sales;</a:t>
+            </a:r>
+            <a:endParaRPr lang="en-US" sz="2000" b="1" i="1" dirty="0"/>
+          </a:p>
+        </p:txBody>
+      </p:sp>
+    </p:spTree>
+    <p:extLst>
+      <p:ext uri="{BB962C8B-B14F-4D97-AF65-F5344CB8AC3E}">
+        <p14:creationId xmlns:p14="http://schemas.microsoft.com/office/powerpoint/2010/main" val="480505148"/>
+      </p:ext>
+    </p:extLst>
+  </p:cSld>
+  <p:clrMapOvr>
+    <a:masterClrMapping/>
+  </p:clrMapOvr>
+</p:sld>
+</file>
+
+<file path=ppt/slides/slide31.xml><?xml version="1.0" encoding="utf-8"?>
+<p:sld xmlns:a="http://schemas.openxmlformats.org/drawingml/2006/main" xmlns:r="http://schemas.openxmlformats.org/officeDocument/2006/relationships" xmlns:p="http://schemas.openxmlformats.org/presentationml/2006/main">
+  <p:cSld>
+    <p:spTree>
+      <p:nvGrpSpPr>
+        <p:cNvPr id="1" name="">
+          <a:extLst>
+            <a:ext uri="{FF2B5EF4-FFF2-40B4-BE49-F238E27FC236}">
+              <a16:creationId xmlns:a16="http://schemas.microsoft.com/office/drawing/2014/main" id="{6B0BC3B5-884D-0594-7BEA-0742BF466E50}"/>
+            </a:ext>
+          </a:extLst>
+        </p:cNvPr>
+        <p:cNvGrpSpPr/>
+        <p:nvPr/>
+      </p:nvGrpSpPr>
+      <p:grpSpPr>
+        <a:xfrm>
+          <a:off x="0" y="0"/>
+          <a:ext cx="0" cy="0"/>
+          <a:chOff x="0" y="0"/>
+          <a:chExt cx="0" cy="0"/>
+        </a:xfrm>
+      </p:grpSpPr>
+      <p:sp>
+        <p:nvSpPr>
+          <p:cNvPr id="2" name="object 2">
+            <a:extLst>
+              <a:ext uri="{FF2B5EF4-FFF2-40B4-BE49-F238E27FC236}">
+                <a16:creationId xmlns:a16="http://schemas.microsoft.com/office/drawing/2014/main" id="{5AB1B15D-852F-48E7-4F62-44889CC24999}"/>
+              </a:ext>
+            </a:extLst>
+          </p:cNvPr>
+          <p:cNvSpPr/>
+          <p:nvPr/>
+        </p:nvSpPr>
+        <p:spPr>
+          <a:xfrm flipH="1">
+            <a:off x="5867400" y="1762886"/>
+            <a:ext cx="45719" cy="4790314"/>
+          </a:xfrm>
+          <a:custGeom>
+            <a:avLst/>
+            <a:gdLst/>
+            <a:ahLst/>
+            <a:cxnLst/>
+            <a:rect l="l" t="t" r="r" b="b"/>
+            <a:pathLst>
+              <a:path h="4645660">
+                <a:moveTo>
+                  <a:pt x="0" y="0"/>
+                </a:moveTo>
+                <a:lnTo>
+                  <a:pt x="0" y="4645482"/>
+                </a:lnTo>
+              </a:path>
+            </a:pathLst>
+          </a:custGeom>
+          <a:ln w="25146">
+            <a:solidFill>
+              <a:srgbClr val="EF5A28"/>
+            </a:solidFill>
+          </a:ln>
+        </p:spPr>
+        <p:txBody>
+          <a:bodyPr wrap="square" lIns="0" tIns="0" rIns="0" bIns="0" rtlCol="0"/>
+          <a:lstStyle/>
+          <a:p>
+            <a:endParaRPr/>
+          </a:p>
+        </p:txBody>
+      </p:sp>
+      <p:sp>
+        <p:nvSpPr>
+          <p:cNvPr id="7" name="object 7">
+            <a:extLst>
+              <a:ext uri="{FF2B5EF4-FFF2-40B4-BE49-F238E27FC236}">
+                <a16:creationId xmlns:a16="http://schemas.microsoft.com/office/drawing/2014/main" id="{C8AF24AB-C3A6-413F-D74A-23D76D653EFD}"/>
+              </a:ext>
+            </a:extLst>
+          </p:cNvPr>
+          <p:cNvSpPr txBox="1">
+            <a:spLocks noGrp="1"/>
+          </p:cNvSpPr>
+          <p:nvPr>
+            <p:ph type="title"/>
+          </p:nvPr>
+        </p:nvSpPr>
+        <p:spPr>
+          <a:xfrm>
+            <a:off x="1994964" y="519066"/>
+            <a:ext cx="9892236" cy="566822"/>
+          </a:xfrm>
+          <a:prstGeom prst="rect">
+            <a:avLst/>
+          </a:prstGeom>
+        </p:spPr>
+        <p:txBody>
+          <a:bodyPr vert="horz" wrap="square" lIns="0" tIns="12700" rIns="0" bIns="0" rtlCol="0">
+            <a:spAutoFit/>
+          </a:bodyPr>
+          <a:lstStyle/>
+          <a:p>
+            <a:pPr marL="12700" algn="ctr">
+              <a:lnSpc>
+                <a:spcPct val="100000"/>
+              </a:lnSpc>
+              <a:spcBef>
+                <a:spcPts val="100"/>
+              </a:spcBef>
+            </a:pPr>
+            <a:r>
+              <a:rPr lang="en-US" dirty="0">
+                <a:solidFill>
+                  <a:schemeClr val="tx1"/>
+                </a:solidFill>
+              </a:rPr>
+              <a:t>Execution Order &amp; The WINDOW Clause</a:t>
+            </a:r>
+            <a:endParaRPr lang="en-IN" spc="25" dirty="0">
+              <a:solidFill>
+                <a:schemeClr val="tx1"/>
+              </a:solidFill>
+            </a:endParaRPr>
+          </a:p>
+        </p:txBody>
+      </p:sp>
+      <p:sp>
+        <p:nvSpPr>
+          <p:cNvPr id="9" name="Slide Number Placeholder 8">
+            <a:extLst>
+              <a:ext uri="{FF2B5EF4-FFF2-40B4-BE49-F238E27FC236}">
+                <a16:creationId xmlns:a16="http://schemas.microsoft.com/office/drawing/2014/main" id="{244E5D67-ADAE-2605-6431-DD8FB10CB4F3}"/>
+              </a:ext>
+            </a:extLst>
+          </p:cNvPr>
+          <p:cNvSpPr>
+            <a:spLocks noGrp="1"/>
+          </p:cNvSpPr>
+          <p:nvPr>
+            <p:ph type="sldNum" sz="quarter" idx="7"/>
+          </p:nvPr>
+        </p:nvSpPr>
+        <p:spPr>
+          <a:xfrm>
+            <a:off x="8778240" y="6362700"/>
+            <a:ext cx="2804160" cy="342900"/>
+          </a:xfrm>
+        </p:spPr>
+        <p:txBody>
+          <a:bodyPr/>
+          <a:lstStyle/>
+          <a:p>
+            <a:fld id="{B6F15528-21DE-4FAA-801E-634DDDAF4B2B}" type="slidenum">
+              <a:rPr/>
+              <a:t>31</a:t>
+            </a:fld>
+            <a:endParaRPr dirty="0"/>
+          </a:p>
+        </p:txBody>
+      </p:sp>
+      <p:sp>
+        <p:nvSpPr>
+          <p:cNvPr id="12" name="object 6">
+            <a:extLst>
+              <a:ext uri="{FF2B5EF4-FFF2-40B4-BE49-F238E27FC236}">
+                <a16:creationId xmlns:a16="http://schemas.microsoft.com/office/drawing/2014/main" id="{B656FBEE-CD93-5A7D-17B4-5EF02F5A9A5D}"/>
+              </a:ext>
+            </a:extLst>
+          </p:cNvPr>
+          <p:cNvSpPr txBox="1"/>
+          <p:nvPr/>
+        </p:nvSpPr>
+        <p:spPr>
+          <a:xfrm>
+            <a:off x="6096000" y="1271125"/>
+            <a:ext cx="6045882" cy="3336170"/>
+          </a:xfrm>
+          <a:prstGeom prst="rect">
+            <a:avLst/>
+          </a:prstGeom>
+        </p:spPr>
+        <p:txBody>
+          <a:bodyPr vert="horz" wrap="square" lIns="0" tIns="12065" rIns="0" bIns="0" rtlCol="0">
+            <a:spAutoFit/>
+          </a:bodyPr>
+          <a:lstStyle/>
+          <a:p>
+            <a:r>
+              <a:rPr lang="en-US" sz="2400" b="1" dirty="0"/>
+              <a:t>Key Constraint: Filtering</a:t>
+            </a:r>
+          </a:p>
+          <a:p>
+            <a:r>
+              <a:rPr lang="en-US" sz="2400" b="1" dirty="0"/>
+              <a:t>The Problem:</a:t>
+            </a:r>
+            <a:r>
+              <a:rPr lang="en-US" sz="2400" dirty="0"/>
+              <a:t> Because window functions execute </a:t>
+            </a:r>
+            <a:r>
+              <a:rPr lang="en-US" sz="2400" i="1" dirty="0"/>
+              <a:t>after</a:t>
+            </a:r>
+            <a:r>
+              <a:rPr lang="en-US" sz="2400" dirty="0"/>
+              <a:t> the WHERE clause, you cannot filter by a windowed result directly (e.g., WHERE rank &lt; 3 will fail).</a:t>
+            </a:r>
+          </a:p>
+          <a:p>
+            <a:r>
+              <a:rPr lang="en-US" sz="2400" b="1" dirty="0"/>
+              <a:t>The Solution:</a:t>
+            </a:r>
+            <a:r>
+              <a:rPr lang="en-US" sz="2400" dirty="0"/>
+              <a:t> Wrap the query in a </a:t>
+            </a:r>
+            <a:r>
+              <a:rPr lang="en-US" sz="2400" b="1" dirty="0"/>
+              <a:t>CTE</a:t>
+            </a:r>
+            <a:r>
+              <a:rPr lang="en-US" sz="2400" dirty="0"/>
+              <a:t> or </a:t>
+            </a:r>
+            <a:r>
+              <a:rPr lang="en-US" sz="2400" b="1" dirty="0"/>
+              <a:t>Subquery</a:t>
+            </a:r>
+            <a:r>
+              <a:rPr lang="en-US" sz="2400" dirty="0"/>
+              <a:t>.</a:t>
+            </a:r>
+          </a:p>
+          <a:p>
+            <a:r>
+              <a:rPr lang="en-US" sz="2400" i="1" dirty="0"/>
+              <a:t>“Calculate the window value in an inner layer, then filter in the outer layer.”</a:t>
+            </a:r>
+            <a:endParaRPr lang="en-US" sz="2400" dirty="0"/>
+          </a:p>
+        </p:txBody>
+      </p:sp>
+      <p:sp>
+        <p:nvSpPr>
+          <p:cNvPr id="14" name="object 6">
+            <a:extLst>
+              <a:ext uri="{FF2B5EF4-FFF2-40B4-BE49-F238E27FC236}">
+                <a16:creationId xmlns:a16="http://schemas.microsoft.com/office/drawing/2014/main" id="{636C3402-37F9-8651-51E0-C7F530CA0EF6}"/>
+              </a:ext>
+            </a:extLst>
+          </p:cNvPr>
+          <p:cNvSpPr txBox="1"/>
+          <p:nvPr/>
+        </p:nvSpPr>
+        <p:spPr>
+          <a:xfrm>
+            <a:off x="152400" y="1240437"/>
+            <a:ext cx="5196373" cy="5706049"/>
+          </a:xfrm>
+          <a:prstGeom prst="rect">
+            <a:avLst/>
+          </a:prstGeom>
+        </p:spPr>
+        <p:txBody>
+          <a:bodyPr vert="horz" wrap="square" lIns="0" tIns="12065" rIns="0" bIns="0" rtlCol="0">
+            <a:spAutoFit/>
+          </a:bodyPr>
+          <a:lstStyle/>
+          <a:p>
+            <a:r>
+              <a:rPr lang="en-US" sz="2000" b="1" dirty="0"/>
+              <a:t>Logical Query Processing Order</a:t>
+            </a:r>
+          </a:p>
+          <a:p>
+            <a:r>
+              <a:rPr lang="en-US" sz="2000" dirty="0"/>
+              <a:t>Window functions are calculated late in the query execution process. This determines where they can and cannot be used.</a:t>
+            </a:r>
+          </a:p>
+          <a:p>
+            <a:r>
+              <a:rPr lang="en-US" sz="2000" b="1" dirty="0"/>
+              <a:t>The Pipeline:</a:t>
+            </a:r>
+          </a:p>
+          <a:p>
+            <a:r>
+              <a:rPr lang="en-US" dirty="0"/>
+              <a:t>FROM / JOIN</a:t>
+            </a:r>
+          </a:p>
+          <a:p>
+            <a:endParaRPr lang="en-US" dirty="0"/>
+          </a:p>
+          <a:p>
+            <a:r>
+              <a:rPr lang="en-US" dirty="0"/>
+              <a:t>WHERE</a:t>
+            </a:r>
+          </a:p>
+          <a:p>
+            <a:endParaRPr lang="en-US" dirty="0"/>
+          </a:p>
+          <a:p>
+            <a:r>
+              <a:rPr lang="en-US" dirty="0"/>
+              <a:t>GROUP BY</a:t>
+            </a:r>
+          </a:p>
+          <a:p>
+            <a:endParaRPr lang="en-US" dirty="0"/>
+          </a:p>
+          <a:p>
+            <a:r>
+              <a:rPr lang="en-US" dirty="0"/>
+              <a:t>HAVING</a:t>
+            </a:r>
+          </a:p>
+          <a:p>
+            <a:endParaRPr lang="en-US" dirty="0"/>
+          </a:p>
+          <a:p>
+            <a:r>
+              <a:rPr lang="en-US" dirty="0"/>
+              <a:t>➜ Window Functions</a:t>
+            </a:r>
+          </a:p>
+          <a:p>
+            <a:endParaRPr lang="en-US" dirty="0"/>
+          </a:p>
+          <a:p>
+            <a:r>
+              <a:rPr lang="en-US" dirty="0"/>
+              <a:t>SELECT / DISTINCT</a:t>
+            </a:r>
+          </a:p>
+          <a:p>
+            <a:endParaRPr lang="en-US" dirty="0"/>
+          </a:p>
+          <a:p>
+            <a:r>
+              <a:rPr lang="en-US" dirty="0"/>
+              <a:t>ORDER BY</a:t>
+            </a:r>
+          </a:p>
+          <a:p>
+            <a:endParaRPr lang="en-US" dirty="0"/>
+          </a:p>
+          <a:p>
+            <a:r>
+              <a:rPr lang="en-US" dirty="0"/>
+              <a:t>LIMIT / OFFSET</a:t>
+            </a:r>
+          </a:p>
+        </p:txBody>
+      </p:sp>
+    </p:spTree>
+    <p:extLst>
+      <p:ext uri="{BB962C8B-B14F-4D97-AF65-F5344CB8AC3E}">
+        <p14:creationId xmlns:p14="http://schemas.microsoft.com/office/powerpoint/2010/main" val="638655576"/>
+      </p:ext>
+    </p:extLst>
+  </p:cSld>
+  <p:clrMapOvr>
+    <a:masterClrMapping/>
+  </p:clrMapOvr>
+</p:sld>
+</file>
+
+<file path=ppt/slides/slide32.xml><?xml version="1.0" encoding="utf-8"?>
+<p:sld xmlns:a="http://schemas.openxmlformats.org/drawingml/2006/main" xmlns:r="http://schemas.openxmlformats.org/officeDocument/2006/relationships" xmlns:p="http://schemas.openxmlformats.org/presentationml/2006/main">
+  <p:cSld>
+    <p:spTree>
+      <p:nvGrpSpPr>
+        <p:cNvPr id="1" name="">
+          <a:extLst>
+            <a:ext uri="{FF2B5EF4-FFF2-40B4-BE49-F238E27FC236}">
+              <a16:creationId xmlns:a16="http://schemas.microsoft.com/office/drawing/2014/main" id="{DBFCF2CD-B67B-F7C4-032E-A63063FF37E2}"/>
+            </a:ext>
+          </a:extLst>
+        </p:cNvPr>
+        <p:cNvGrpSpPr/>
+        <p:nvPr/>
+      </p:nvGrpSpPr>
+      <p:grpSpPr>
+        <a:xfrm>
+          <a:off x="0" y="0"/>
+          <a:ext cx="0" cy="0"/>
+          <a:chOff x="0" y="0"/>
+          <a:chExt cx="0" cy="0"/>
+        </a:xfrm>
+      </p:grpSpPr>
+      <p:sp>
+        <p:nvSpPr>
+          <p:cNvPr id="2" name="object 2">
+            <a:extLst>
+              <a:ext uri="{FF2B5EF4-FFF2-40B4-BE49-F238E27FC236}">
+                <a16:creationId xmlns:a16="http://schemas.microsoft.com/office/drawing/2014/main" id="{1181A42E-FD1C-5780-86E3-74F3BA121378}"/>
+              </a:ext>
+            </a:extLst>
+          </p:cNvPr>
+          <p:cNvSpPr txBox="1"/>
+          <p:nvPr/>
+        </p:nvSpPr>
+        <p:spPr>
+          <a:xfrm>
+            <a:off x="1625503" y="1916187"/>
+            <a:ext cx="1377315" cy="574040"/>
+          </a:xfrm>
+          <a:prstGeom prst="rect">
+            <a:avLst/>
+          </a:prstGeom>
+        </p:spPr>
+        <p:txBody>
+          <a:bodyPr vert="horz" wrap="square" lIns="0" tIns="12700" rIns="0" bIns="0" rtlCol="0">
+            <a:spAutoFit/>
+          </a:bodyPr>
+          <a:lstStyle/>
+          <a:p>
+            <a:pPr marL="12700">
+              <a:lnSpc>
+                <a:spcPct val="100000"/>
+              </a:lnSpc>
+              <a:spcBef>
+                <a:spcPts val="100"/>
+              </a:spcBef>
+            </a:pPr>
+            <a:r>
+              <a:rPr sz="3600" spc="35" dirty="0">
+                <a:solidFill>
+                  <a:srgbClr val="FFFFFF"/>
+                </a:solidFill>
+                <a:latin typeface="Verdana" panose="020B0604030504040204"/>
+                <a:cs typeface="Verdana" panose="020B0604030504040204"/>
+              </a:rPr>
+              <a:t>D</a:t>
+            </a:r>
+            <a:r>
+              <a:rPr sz="3600" spc="-55" dirty="0">
+                <a:solidFill>
+                  <a:srgbClr val="FFFFFF"/>
+                </a:solidFill>
+                <a:latin typeface="Verdana" panose="020B0604030504040204"/>
+                <a:cs typeface="Verdana" panose="020B0604030504040204"/>
+              </a:rPr>
+              <a:t>e</a:t>
+            </a:r>
+            <a:r>
+              <a:rPr sz="3600" spc="-75" dirty="0">
+                <a:solidFill>
+                  <a:srgbClr val="FFFFFF"/>
+                </a:solidFill>
+                <a:latin typeface="Verdana" panose="020B0604030504040204"/>
+                <a:cs typeface="Verdana" panose="020B0604030504040204"/>
+              </a:rPr>
+              <a:t>m</a:t>
+            </a:r>
+            <a:r>
+              <a:rPr sz="3600" spc="114" dirty="0">
+                <a:solidFill>
+                  <a:srgbClr val="FFFFFF"/>
+                </a:solidFill>
+                <a:latin typeface="Verdana" panose="020B0604030504040204"/>
+                <a:cs typeface="Verdana" panose="020B0604030504040204"/>
+              </a:rPr>
+              <a:t>o</a:t>
+            </a:r>
+            <a:endParaRPr sz="3600">
+              <a:latin typeface="Verdana" panose="020B0604030504040204"/>
+              <a:cs typeface="Verdana" panose="020B0604030504040204"/>
+            </a:endParaRPr>
+          </a:p>
+        </p:txBody>
+      </p:sp>
+      <p:sp>
+        <p:nvSpPr>
+          <p:cNvPr id="3" name="object 3">
+            <a:extLst>
+              <a:ext uri="{FF2B5EF4-FFF2-40B4-BE49-F238E27FC236}">
+                <a16:creationId xmlns:a16="http://schemas.microsoft.com/office/drawing/2014/main" id="{D2918402-2CDF-3C48-0A5F-4A8B9F5085AF}"/>
+              </a:ext>
+            </a:extLst>
+          </p:cNvPr>
+          <p:cNvSpPr txBox="1"/>
+          <p:nvPr/>
+        </p:nvSpPr>
+        <p:spPr>
+          <a:xfrm>
+            <a:off x="5591602" y="2203207"/>
+            <a:ext cx="4601210" cy="751488"/>
+          </a:xfrm>
+          <a:prstGeom prst="rect">
+            <a:avLst/>
+          </a:prstGeom>
+        </p:spPr>
+        <p:txBody>
+          <a:bodyPr vert="horz" wrap="square" lIns="0" tIns="12700" rIns="0" bIns="0" rtlCol="0">
+            <a:spAutoFit/>
+          </a:bodyPr>
+          <a:lstStyle/>
+          <a:p>
+            <a:pPr marL="12700" algn="ctr">
+              <a:lnSpc>
+                <a:spcPct val="100000"/>
+              </a:lnSpc>
+              <a:spcBef>
+                <a:spcPts val="100"/>
+              </a:spcBef>
+            </a:pPr>
+            <a:r>
+              <a:rPr lang="en-US" sz="2400" b="1" dirty="0">
+                <a:solidFill>
+                  <a:srgbClr val="00B0F0"/>
+                </a:solidFill>
+              </a:rPr>
+              <a:t>Ranking the Most Delayed Flights per Carrier</a:t>
+            </a:r>
+            <a:endParaRPr sz="2400" b="1" dirty="0">
+              <a:solidFill>
+                <a:srgbClr val="00B0F0"/>
+              </a:solidFill>
+              <a:latin typeface="Verdana" panose="020B0604030504040204"/>
+              <a:cs typeface="Verdana" panose="020B0604030504040204"/>
+            </a:endParaRPr>
+          </a:p>
+        </p:txBody>
+      </p:sp>
+      <p:sp>
+        <p:nvSpPr>
+          <p:cNvPr id="4" name="Slide Number Placeholder 3">
+            <a:extLst>
+              <a:ext uri="{FF2B5EF4-FFF2-40B4-BE49-F238E27FC236}">
+                <a16:creationId xmlns:a16="http://schemas.microsoft.com/office/drawing/2014/main" id="{60A0AE48-559A-0853-261A-989F601CAC25}"/>
+              </a:ext>
+            </a:extLst>
+          </p:cNvPr>
+          <p:cNvSpPr>
+            <a:spLocks noGrp="1"/>
+          </p:cNvSpPr>
+          <p:nvPr>
+            <p:ph type="sldNum" sz="quarter" idx="7"/>
+          </p:nvPr>
+        </p:nvSpPr>
+        <p:spPr/>
+        <p:txBody>
+          <a:bodyPr/>
+          <a:lstStyle/>
+          <a:p>
+            <a:fld id="{B6F15528-21DE-4FAA-801E-634DDDAF4B2B}" type="slidenum">
+              <a:rPr/>
+              <a:t>32</a:t>
+            </a:fld>
+            <a:endParaRPr/>
+          </a:p>
+        </p:txBody>
+      </p:sp>
+      <p:sp>
+        <p:nvSpPr>
+          <p:cNvPr id="5" name="object 3">
+            <a:extLst>
+              <a:ext uri="{FF2B5EF4-FFF2-40B4-BE49-F238E27FC236}">
+                <a16:creationId xmlns:a16="http://schemas.microsoft.com/office/drawing/2014/main" id="{4352E31E-B325-0A82-679F-0782ABC2ED10}"/>
+              </a:ext>
+            </a:extLst>
+          </p:cNvPr>
+          <p:cNvSpPr txBox="1"/>
+          <p:nvPr/>
+        </p:nvSpPr>
+        <p:spPr>
+          <a:xfrm>
+            <a:off x="5744002" y="3439512"/>
+            <a:ext cx="4601210" cy="1859483"/>
+          </a:xfrm>
+          <a:prstGeom prst="rect">
+            <a:avLst/>
+          </a:prstGeom>
+        </p:spPr>
+        <p:txBody>
+          <a:bodyPr vert="horz" wrap="square" lIns="0" tIns="12700" rIns="0" bIns="0" rtlCol="0">
+            <a:spAutoFit/>
+          </a:bodyPr>
+          <a:lstStyle/>
+          <a:p>
+            <a:pPr marL="12700">
+              <a:lnSpc>
+                <a:spcPct val="100000"/>
+              </a:lnSpc>
+              <a:spcBef>
+                <a:spcPts val="100"/>
+              </a:spcBef>
+            </a:pPr>
+            <a:r>
+              <a:rPr lang="en-US" sz="2400" b="1" dirty="0"/>
+              <a:t>Scenario:</a:t>
+            </a:r>
+            <a:r>
+              <a:rPr lang="en-US" sz="2400" dirty="0"/>
+              <a:t> The operations team wants to identify the top 3 flights with the highest departure delays for </a:t>
+            </a:r>
+            <a:r>
+              <a:rPr lang="en-US" sz="2400" i="1" dirty="0"/>
+              <a:t>each</a:t>
+            </a:r>
+            <a:r>
+              <a:rPr lang="en-US" sz="2400" dirty="0"/>
+              <a:t> airline to investigate the causes.</a:t>
+            </a:r>
+            <a:endParaRPr sz="2400" dirty="0">
+              <a:solidFill>
+                <a:srgbClr val="00B0F0"/>
+              </a:solidFill>
+              <a:latin typeface="Verdana" panose="020B0604030504040204"/>
+              <a:cs typeface="Verdana" panose="020B0604030504040204"/>
+            </a:endParaRPr>
+          </a:p>
+        </p:txBody>
+      </p:sp>
+    </p:spTree>
+    <p:extLst>
+      <p:ext uri="{BB962C8B-B14F-4D97-AF65-F5344CB8AC3E}">
+        <p14:creationId xmlns:p14="http://schemas.microsoft.com/office/powerpoint/2010/main" val="1595480259"/>
+      </p:ext>
+    </p:extLst>
+  </p:cSld>
+  <p:clrMapOvr>
+    <a:masterClrMapping/>
+  </p:clrMapOvr>
+</p:sld>
+</file>
+
+<file path=ppt/slides/slide33.xml><?xml version="1.0" encoding="utf-8"?>
+<p:sld xmlns:a="http://schemas.openxmlformats.org/drawingml/2006/main" xmlns:r="http://schemas.openxmlformats.org/officeDocument/2006/relationships" xmlns:p="http://schemas.openxmlformats.org/presentationml/2006/main">
+  <p:cSld>
+    <p:spTree>
+      <p:nvGrpSpPr>
+        <p:cNvPr id="1" name="">
+          <a:extLst>
+            <a:ext uri="{FF2B5EF4-FFF2-40B4-BE49-F238E27FC236}">
+              <a16:creationId xmlns:a16="http://schemas.microsoft.com/office/drawing/2014/main" id="{D523C7D3-0B85-6705-B4B9-486B8933496E}"/>
+            </a:ext>
+          </a:extLst>
+        </p:cNvPr>
+        <p:cNvGrpSpPr/>
+        <p:nvPr/>
+      </p:nvGrpSpPr>
+      <p:grpSpPr>
+        <a:xfrm>
+          <a:off x="0" y="0"/>
+          <a:ext cx="0" cy="0"/>
+          <a:chOff x="0" y="0"/>
+          <a:chExt cx="0" cy="0"/>
+        </a:xfrm>
+      </p:grpSpPr>
+      <p:sp>
+        <p:nvSpPr>
+          <p:cNvPr id="2" name="object 2">
+            <a:extLst>
+              <a:ext uri="{FF2B5EF4-FFF2-40B4-BE49-F238E27FC236}">
+                <a16:creationId xmlns:a16="http://schemas.microsoft.com/office/drawing/2014/main" id="{F13DA6DC-5E63-4727-51CC-F29C00EFA251}"/>
+              </a:ext>
+            </a:extLst>
+          </p:cNvPr>
+          <p:cNvSpPr txBox="1"/>
+          <p:nvPr/>
+        </p:nvSpPr>
+        <p:spPr>
+          <a:xfrm>
+            <a:off x="1625503" y="1916187"/>
+            <a:ext cx="1377315" cy="574040"/>
+          </a:xfrm>
+          <a:prstGeom prst="rect">
+            <a:avLst/>
+          </a:prstGeom>
+        </p:spPr>
+        <p:txBody>
+          <a:bodyPr vert="horz" wrap="square" lIns="0" tIns="12700" rIns="0" bIns="0" rtlCol="0">
+            <a:spAutoFit/>
+          </a:bodyPr>
+          <a:lstStyle/>
+          <a:p>
+            <a:pPr marL="12700">
+              <a:lnSpc>
+                <a:spcPct val="100000"/>
+              </a:lnSpc>
+              <a:spcBef>
+                <a:spcPts val="100"/>
+              </a:spcBef>
+            </a:pPr>
+            <a:r>
+              <a:rPr sz="3600" spc="35" dirty="0">
+                <a:solidFill>
+                  <a:srgbClr val="FFFFFF"/>
+                </a:solidFill>
+                <a:latin typeface="Verdana" panose="020B0604030504040204"/>
+                <a:cs typeface="Verdana" panose="020B0604030504040204"/>
+              </a:rPr>
+              <a:t>D</a:t>
+            </a:r>
+            <a:r>
+              <a:rPr sz="3600" spc="-55" dirty="0">
+                <a:solidFill>
+                  <a:srgbClr val="FFFFFF"/>
+                </a:solidFill>
+                <a:latin typeface="Verdana" panose="020B0604030504040204"/>
+                <a:cs typeface="Verdana" panose="020B0604030504040204"/>
+              </a:rPr>
+              <a:t>e</a:t>
+            </a:r>
+            <a:r>
+              <a:rPr sz="3600" spc="-75" dirty="0">
+                <a:solidFill>
+                  <a:srgbClr val="FFFFFF"/>
+                </a:solidFill>
+                <a:latin typeface="Verdana" panose="020B0604030504040204"/>
+                <a:cs typeface="Verdana" panose="020B0604030504040204"/>
+              </a:rPr>
+              <a:t>m</a:t>
+            </a:r>
+            <a:r>
+              <a:rPr sz="3600" spc="114" dirty="0">
+                <a:solidFill>
+                  <a:srgbClr val="FFFFFF"/>
+                </a:solidFill>
+                <a:latin typeface="Verdana" panose="020B0604030504040204"/>
+                <a:cs typeface="Verdana" panose="020B0604030504040204"/>
+              </a:rPr>
+              <a:t>o</a:t>
+            </a:r>
+            <a:endParaRPr sz="3600">
+              <a:latin typeface="Verdana" panose="020B0604030504040204"/>
+              <a:cs typeface="Verdana" panose="020B0604030504040204"/>
+            </a:endParaRPr>
+          </a:p>
+        </p:txBody>
+      </p:sp>
+      <p:sp>
+        <p:nvSpPr>
+          <p:cNvPr id="3" name="object 3">
+            <a:extLst>
+              <a:ext uri="{FF2B5EF4-FFF2-40B4-BE49-F238E27FC236}">
+                <a16:creationId xmlns:a16="http://schemas.microsoft.com/office/drawing/2014/main" id="{18A24368-5EEA-93B0-4696-CBFF7E61828B}"/>
+              </a:ext>
+            </a:extLst>
+          </p:cNvPr>
+          <p:cNvSpPr txBox="1"/>
+          <p:nvPr/>
+        </p:nvSpPr>
+        <p:spPr>
+          <a:xfrm>
+            <a:off x="5591602" y="2203207"/>
+            <a:ext cx="4601210" cy="751488"/>
+          </a:xfrm>
+          <a:prstGeom prst="rect">
+            <a:avLst/>
+          </a:prstGeom>
+        </p:spPr>
+        <p:txBody>
+          <a:bodyPr vert="horz" wrap="square" lIns="0" tIns="12700" rIns="0" bIns="0" rtlCol="0">
+            <a:spAutoFit/>
+          </a:bodyPr>
+          <a:lstStyle/>
+          <a:p>
+            <a:pPr marL="12700" algn="ctr">
+              <a:lnSpc>
+                <a:spcPct val="100000"/>
+              </a:lnSpc>
+              <a:spcBef>
+                <a:spcPts val="100"/>
+              </a:spcBef>
+            </a:pPr>
+            <a:r>
+              <a:rPr lang="en-US" sz="2400" b="1" dirty="0">
+                <a:solidFill>
+                  <a:srgbClr val="00B0F0"/>
+                </a:solidFill>
+              </a:rPr>
+              <a:t>Comparative Analysis (Daily Delay vs. Carrier Average)</a:t>
+            </a:r>
+            <a:endParaRPr sz="2400" b="1" dirty="0">
+              <a:solidFill>
+                <a:srgbClr val="00B0F0"/>
+              </a:solidFill>
+              <a:latin typeface="Verdana" panose="020B0604030504040204"/>
+              <a:cs typeface="Verdana" panose="020B0604030504040204"/>
+            </a:endParaRPr>
+          </a:p>
+        </p:txBody>
+      </p:sp>
+      <p:sp>
+        <p:nvSpPr>
+          <p:cNvPr id="4" name="Slide Number Placeholder 3">
+            <a:extLst>
+              <a:ext uri="{FF2B5EF4-FFF2-40B4-BE49-F238E27FC236}">
+                <a16:creationId xmlns:a16="http://schemas.microsoft.com/office/drawing/2014/main" id="{9BC4C36D-0E2A-FCF9-E057-B55B5762281D}"/>
+              </a:ext>
+            </a:extLst>
+          </p:cNvPr>
+          <p:cNvSpPr>
+            <a:spLocks noGrp="1"/>
+          </p:cNvSpPr>
+          <p:nvPr>
+            <p:ph type="sldNum" sz="quarter" idx="7"/>
+          </p:nvPr>
+        </p:nvSpPr>
+        <p:spPr/>
+        <p:txBody>
+          <a:bodyPr/>
+          <a:lstStyle/>
+          <a:p>
+            <a:fld id="{B6F15528-21DE-4FAA-801E-634DDDAF4B2B}" type="slidenum">
+              <a:rPr/>
+              <a:t>33</a:t>
+            </a:fld>
+            <a:endParaRPr/>
+          </a:p>
+        </p:txBody>
+      </p:sp>
+      <p:sp>
+        <p:nvSpPr>
+          <p:cNvPr id="5" name="object 3">
+            <a:extLst>
+              <a:ext uri="{FF2B5EF4-FFF2-40B4-BE49-F238E27FC236}">
+                <a16:creationId xmlns:a16="http://schemas.microsoft.com/office/drawing/2014/main" id="{B456DC61-D6FE-F63E-4971-3649AD5A7CEA}"/>
+              </a:ext>
+            </a:extLst>
+          </p:cNvPr>
+          <p:cNvSpPr txBox="1"/>
+          <p:nvPr/>
+        </p:nvSpPr>
+        <p:spPr>
+          <a:xfrm>
+            <a:off x="5744002" y="3439512"/>
+            <a:ext cx="4601210" cy="1859483"/>
+          </a:xfrm>
+          <a:prstGeom prst="rect">
+            <a:avLst/>
+          </a:prstGeom>
+        </p:spPr>
+        <p:txBody>
+          <a:bodyPr vert="horz" wrap="square" lIns="0" tIns="12700" rIns="0" bIns="0" rtlCol="0">
+            <a:spAutoFit/>
+          </a:bodyPr>
+          <a:lstStyle/>
+          <a:p>
+            <a:pPr marL="12700">
+              <a:lnSpc>
+                <a:spcPct val="100000"/>
+              </a:lnSpc>
+              <a:spcBef>
+                <a:spcPts val="100"/>
+              </a:spcBef>
+            </a:pPr>
+            <a:r>
+              <a:rPr lang="en-US" sz="2400" b="1" dirty="0"/>
+              <a:t>Scenario:</a:t>
+            </a:r>
+            <a:r>
+              <a:rPr lang="en-US" sz="2400" dirty="0"/>
+              <a:t> You want to see every individual flight's delay and immediately know how it compares to that specific airline's overall average delay for that day.</a:t>
+            </a:r>
+            <a:endParaRPr sz="2400" dirty="0">
+              <a:solidFill>
+                <a:srgbClr val="00B0F0"/>
+              </a:solidFill>
+              <a:latin typeface="Verdana" panose="020B0604030504040204"/>
+              <a:cs typeface="Verdana" panose="020B0604030504040204"/>
+            </a:endParaRPr>
+          </a:p>
+        </p:txBody>
+      </p:sp>
+    </p:spTree>
+    <p:extLst>
+      <p:ext uri="{BB962C8B-B14F-4D97-AF65-F5344CB8AC3E}">
+        <p14:creationId xmlns:p14="http://schemas.microsoft.com/office/powerpoint/2010/main" val="2478739794"/>
+      </p:ext>
+    </p:extLst>
+  </p:cSld>
+  <p:clrMapOvr>
+    <a:masterClrMapping/>
+  </p:clrMapOvr>
+</p:sld>
+</file>
+
+<file path=ppt/slides/slide34.xml><?xml version="1.0" encoding="utf-8"?>
+<p:sld xmlns:a="http://schemas.openxmlformats.org/drawingml/2006/main" xmlns:r="http://schemas.openxmlformats.org/officeDocument/2006/relationships" xmlns:p="http://schemas.openxmlformats.org/presentationml/2006/main">
+  <p:cSld>
+    <p:spTree>
+      <p:nvGrpSpPr>
+        <p:cNvPr id="1" name=""/>
+        <p:cNvGrpSpPr/>
+        <p:nvPr/>
+      </p:nvGrpSpPr>
+      <p:grpSpPr>
+        <a:xfrm>
+          <a:off x="0" y="0"/>
+          <a:ext cx="0" cy="0"/>
+          <a:chOff x="0" y="0"/>
+          <a:chExt cx="0" cy="0"/>
+        </a:xfrm>
+      </p:grpSpPr>
+      <p:pic>
+        <p:nvPicPr>
+          <p:cNvPr id="2" name="object 2"/>
+          <p:cNvPicPr/>
+          <p:nvPr/>
+        </p:nvPicPr>
+        <p:blipFill>
+          <a:blip r:embed="rId2" cstate="print"/>
+          <a:stretch>
+            <a:fillRect/>
+          </a:stretch>
+        </p:blipFill>
+        <p:spPr>
+          <a:xfrm>
+            <a:off x="0" y="0"/>
+            <a:ext cx="4635246" cy="6858000"/>
+          </a:xfrm>
+          <a:prstGeom prst="rect">
+            <a:avLst/>
+          </a:prstGeom>
+        </p:spPr>
+      </p:pic>
+      <p:sp>
+        <p:nvSpPr>
+          <p:cNvPr id="3" name="object 3"/>
+          <p:cNvSpPr txBox="1"/>
+          <p:nvPr/>
+        </p:nvSpPr>
+        <p:spPr>
+          <a:xfrm>
+            <a:off x="5230620" y="2079350"/>
+            <a:ext cx="6437630" cy="2463800"/>
+          </a:xfrm>
+          <a:prstGeom prst="rect">
+            <a:avLst/>
+          </a:prstGeom>
+        </p:spPr>
+        <p:txBody>
+          <a:bodyPr vert="horz" wrap="square" lIns="0" tIns="12700" rIns="0" bIns="0" rtlCol="0">
+            <a:spAutoFit/>
+          </a:bodyPr>
+          <a:lstStyle/>
+          <a:p>
+            <a:pPr marL="12700">
+              <a:lnSpc>
+                <a:spcPct val="100000"/>
+              </a:lnSpc>
+              <a:spcBef>
+                <a:spcPts val="100"/>
+              </a:spcBef>
+            </a:pPr>
+            <a:r>
+              <a:rPr sz="2400" spc="80" dirty="0">
+                <a:solidFill>
+                  <a:srgbClr val="EF5A28"/>
+                </a:solidFill>
+                <a:latin typeface="Verdana" panose="020B0604030504040204"/>
+                <a:cs typeface="Verdana" panose="020B0604030504040204"/>
+              </a:rPr>
+              <a:t>ORDER</a:t>
+            </a:r>
+            <a:r>
+              <a:rPr sz="2400" spc="-135" dirty="0">
+                <a:solidFill>
+                  <a:srgbClr val="EF5A28"/>
+                </a:solidFill>
+                <a:latin typeface="Verdana" panose="020B0604030504040204"/>
+                <a:cs typeface="Verdana" panose="020B0604030504040204"/>
+              </a:rPr>
+              <a:t> </a:t>
+            </a:r>
+            <a:r>
+              <a:rPr sz="2400" spc="160" dirty="0">
+                <a:solidFill>
+                  <a:srgbClr val="EF5A28"/>
+                </a:solidFill>
+                <a:latin typeface="Verdana" panose="020B0604030504040204"/>
+                <a:cs typeface="Verdana" panose="020B0604030504040204"/>
+              </a:rPr>
+              <a:t>BY</a:t>
+            </a:r>
+            <a:r>
+              <a:rPr sz="2400" spc="-135" dirty="0">
+                <a:solidFill>
+                  <a:srgbClr val="EF5A28"/>
+                </a:solidFill>
+                <a:latin typeface="Verdana" panose="020B0604030504040204"/>
+                <a:cs typeface="Verdana" panose="020B0604030504040204"/>
+              </a:rPr>
+              <a:t> </a:t>
+            </a:r>
+            <a:r>
+              <a:rPr sz="2400" dirty="0">
+                <a:solidFill>
+                  <a:srgbClr val="EF5A28"/>
+                </a:solidFill>
+                <a:latin typeface="Verdana" panose="020B0604030504040204"/>
+                <a:cs typeface="Verdana" panose="020B0604030504040204"/>
+              </a:rPr>
+              <a:t>sorts</a:t>
+            </a:r>
+            <a:r>
+              <a:rPr sz="2400" spc="-135" dirty="0">
+                <a:solidFill>
+                  <a:srgbClr val="EF5A28"/>
+                </a:solidFill>
+                <a:latin typeface="Verdana" panose="020B0604030504040204"/>
+                <a:cs typeface="Verdana" panose="020B0604030504040204"/>
+              </a:rPr>
+              <a:t> </a:t>
+            </a:r>
+            <a:r>
+              <a:rPr sz="2400" spc="15" dirty="0">
+                <a:solidFill>
+                  <a:srgbClr val="EF5A28"/>
+                </a:solidFill>
+                <a:latin typeface="Verdana" panose="020B0604030504040204"/>
+                <a:cs typeface="Verdana" panose="020B0604030504040204"/>
+              </a:rPr>
+              <a:t>query</a:t>
+            </a:r>
+            <a:r>
+              <a:rPr sz="2400" spc="-130" dirty="0">
+                <a:solidFill>
+                  <a:srgbClr val="EF5A28"/>
+                </a:solidFill>
+                <a:latin typeface="Verdana" panose="020B0604030504040204"/>
+                <a:cs typeface="Verdana" panose="020B0604030504040204"/>
+              </a:rPr>
+              <a:t> </a:t>
+            </a:r>
+            <a:r>
+              <a:rPr sz="2400" spc="-15" dirty="0">
+                <a:solidFill>
+                  <a:srgbClr val="EF5A28"/>
+                </a:solidFill>
+                <a:latin typeface="Verdana" panose="020B0604030504040204"/>
+                <a:cs typeface="Verdana" panose="020B0604030504040204"/>
+              </a:rPr>
+              <a:t>results</a:t>
+            </a:r>
+            <a:endParaRPr sz="2400">
+              <a:latin typeface="Verdana" panose="020B0604030504040204"/>
+              <a:cs typeface="Verdana" panose="020B0604030504040204"/>
+            </a:endParaRPr>
+          </a:p>
+          <a:p>
+            <a:pPr marL="12700">
+              <a:lnSpc>
+                <a:spcPct val="100000"/>
+              </a:lnSpc>
+              <a:spcBef>
+                <a:spcPts val="1800"/>
+              </a:spcBef>
+            </a:pPr>
+            <a:r>
+              <a:rPr sz="2400" spc="65" dirty="0">
+                <a:solidFill>
+                  <a:srgbClr val="EF5A28"/>
+                </a:solidFill>
+                <a:latin typeface="Verdana" panose="020B0604030504040204"/>
+                <a:cs typeface="Verdana" panose="020B0604030504040204"/>
+              </a:rPr>
+              <a:t>Aggregate</a:t>
+            </a:r>
+            <a:r>
+              <a:rPr sz="2400" spc="-140" dirty="0">
+                <a:solidFill>
+                  <a:srgbClr val="EF5A28"/>
+                </a:solidFill>
+                <a:latin typeface="Verdana" panose="020B0604030504040204"/>
+                <a:cs typeface="Verdana" panose="020B0604030504040204"/>
+              </a:rPr>
+              <a:t> </a:t>
+            </a:r>
+            <a:r>
+              <a:rPr sz="2400" spc="20" dirty="0">
+                <a:solidFill>
+                  <a:srgbClr val="EF5A28"/>
+                </a:solidFill>
+                <a:latin typeface="Verdana" panose="020B0604030504040204"/>
+                <a:cs typeface="Verdana" panose="020B0604030504040204"/>
+              </a:rPr>
+              <a:t>functions</a:t>
+            </a:r>
+            <a:r>
+              <a:rPr sz="2400" spc="-135" dirty="0">
+                <a:solidFill>
+                  <a:srgbClr val="EF5A28"/>
+                </a:solidFill>
+                <a:latin typeface="Verdana" panose="020B0604030504040204"/>
+                <a:cs typeface="Verdana" panose="020B0604030504040204"/>
+              </a:rPr>
+              <a:t> </a:t>
+            </a:r>
+            <a:r>
+              <a:rPr sz="2400" spc="25" dirty="0">
+                <a:solidFill>
+                  <a:srgbClr val="EF5A28"/>
+                </a:solidFill>
+                <a:latin typeface="Verdana" panose="020B0604030504040204"/>
+                <a:cs typeface="Verdana" panose="020B0604030504040204"/>
+              </a:rPr>
+              <a:t>perform</a:t>
+            </a:r>
+            <a:r>
+              <a:rPr sz="2400" spc="-135" dirty="0">
+                <a:solidFill>
+                  <a:srgbClr val="EF5A28"/>
+                </a:solidFill>
+                <a:latin typeface="Verdana" panose="020B0604030504040204"/>
+                <a:cs typeface="Verdana" panose="020B0604030504040204"/>
+              </a:rPr>
+              <a:t> </a:t>
+            </a:r>
+            <a:r>
+              <a:rPr sz="2400" spc="25" dirty="0">
+                <a:solidFill>
+                  <a:srgbClr val="EF5A28"/>
+                </a:solidFill>
+                <a:latin typeface="Verdana" panose="020B0604030504040204"/>
+                <a:cs typeface="Verdana" panose="020B0604030504040204"/>
+              </a:rPr>
+              <a:t>calculations</a:t>
+            </a:r>
+            <a:endParaRPr sz="2400">
+              <a:latin typeface="Verdana" panose="020B0604030504040204"/>
+              <a:cs typeface="Verdana" panose="020B0604030504040204"/>
+            </a:endParaRPr>
+          </a:p>
+          <a:p>
+            <a:pPr marL="536575" indent="-289560">
+              <a:lnSpc>
+                <a:spcPct val="100000"/>
+              </a:lnSpc>
+              <a:spcBef>
+                <a:spcPts val="600"/>
+              </a:spcBef>
+              <a:buSzPct val="75000"/>
+              <a:buFont typeface="Segoe UI" panose="020B0502040204020203"/>
+              <a:buChar char="-"/>
+              <a:tabLst>
+                <a:tab pos="536575" algn="l"/>
+                <a:tab pos="537210" algn="l"/>
+              </a:tabLst>
+            </a:pPr>
+            <a:r>
+              <a:rPr sz="2400" spc="55" dirty="0">
+                <a:solidFill>
+                  <a:srgbClr val="EF5A28"/>
+                </a:solidFill>
+                <a:latin typeface="Verdana" panose="020B0604030504040204"/>
+                <a:cs typeface="Verdana" panose="020B0604030504040204"/>
+              </a:rPr>
+              <a:t>On</a:t>
+            </a:r>
+            <a:r>
+              <a:rPr sz="2400" spc="-150" dirty="0">
+                <a:solidFill>
+                  <a:srgbClr val="EF5A28"/>
+                </a:solidFill>
+                <a:latin typeface="Verdana" panose="020B0604030504040204"/>
+                <a:cs typeface="Verdana" panose="020B0604030504040204"/>
+              </a:rPr>
+              <a:t> </a:t>
+            </a:r>
+            <a:r>
+              <a:rPr sz="2400" spc="-30" dirty="0">
+                <a:solidFill>
+                  <a:srgbClr val="EF5A28"/>
+                </a:solidFill>
+                <a:latin typeface="Verdana" panose="020B0604030504040204"/>
+                <a:cs typeface="Verdana" panose="020B0604030504040204"/>
+              </a:rPr>
+              <a:t>entire</a:t>
+            </a:r>
+            <a:r>
+              <a:rPr sz="2400" spc="-135" dirty="0">
+                <a:solidFill>
+                  <a:srgbClr val="EF5A28"/>
+                </a:solidFill>
+                <a:latin typeface="Verdana" panose="020B0604030504040204"/>
+                <a:cs typeface="Verdana" panose="020B0604030504040204"/>
+              </a:rPr>
+              <a:t> </a:t>
+            </a:r>
+            <a:r>
+              <a:rPr sz="2400" dirty="0">
+                <a:solidFill>
+                  <a:srgbClr val="EF5A28"/>
+                </a:solidFill>
+                <a:latin typeface="Verdana" panose="020B0604030504040204"/>
+                <a:cs typeface="Verdana" panose="020B0604030504040204"/>
+              </a:rPr>
+              <a:t>data</a:t>
+            </a:r>
+            <a:r>
+              <a:rPr sz="2400" spc="-145" dirty="0">
+                <a:solidFill>
+                  <a:srgbClr val="EF5A28"/>
+                </a:solidFill>
+                <a:latin typeface="Verdana" panose="020B0604030504040204"/>
+                <a:cs typeface="Verdana" panose="020B0604030504040204"/>
+              </a:rPr>
+              <a:t> </a:t>
+            </a:r>
+            <a:r>
+              <a:rPr sz="2400" spc="-20" dirty="0">
+                <a:solidFill>
+                  <a:srgbClr val="EF5A28"/>
+                </a:solidFill>
+                <a:latin typeface="Verdana" panose="020B0604030504040204"/>
+                <a:cs typeface="Verdana" panose="020B0604030504040204"/>
+              </a:rPr>
+              <a:t>set</a:t>
+            </a:r>
+            <a:endParaRPr sz="2400">
+              <a:latin typeface="Verdana" panose="020B0604030504040204"/>
+              <a:cs typeface="Verdana" panose="020B0604030504040204"/>
+            </a:endParaRPr>
+          </a:p>
+          <a:p>
+            <a:pPr marL="536575" indent="-289560">
+              <a:lnSpc>
+                <a:spcPct val="100000"/>
+              </a:lnSpc>
+              <a:spcBef>
+                <a:spcPts val="600"/>
+              </a:spcBef>
+              <a:buSzPct val="75000"/>
+              <a:buFont typeface="Segoe UI" panose="020B0502040204020203"/>
+              <a:buChar char="-"/>
+              <a:tabLst>
+                <a:tab pos="536575" algn="l"/>
+                <a:tab pos="537210" algn="l"/>
+              </a:tabLst>
+            </a:pPr>
+            <a:r>
+              <a:rPr sz="2400" spc="55" dirty="0">
+                <a:solidFill>
+                  <a:srgbClr val="EF5A28"/>
+                </a:solidFill>
+                <a:latin typeface="Verdana" panose="020B0604030504040204"/>
+                <a:cs typeface="Verdana" panose="020B0604030504040204"/>
+              </a:rPr>
+              <a:t>On</a:t>
+            </a:r>
+            <a:r>
+              <a:rPr sz="2400" spc="-140" dirty="0">
+                <a:solidFill>
+                  <a:srgbClr val="EF5A28"/>
+                </a:solidFill>
+                <a:latin typeface="Verdana" panose="020B0604030504040204"/>
+                <a:cs typeface="Verdana" panose="020B0604030504040204"/>
+              </a:rPr>
+              <a:t> </a:t>
+            </a:r>
+            <a:r>
+              <a:rPr sz="2400" spc="10" dirty="0">
+                <a:solidFill>
+                  <a:srgbClr val="EF5A28"/>
+                </a:solidFill>
+                <a:latin typeface="Verdana" panose="020B0604030504040204"/>
+                <a:cs typeface="Verdana" panose="020B0604030504040204"/>
+              </a:rPr>
+              <a:t>groups</a:t>
+            </a:r>
+            <a:r>
+              <a:rPr sz="2400" spc="-130" dirty="0">
+                <a:solidFill>
+                  <a:srgbClr val="EF5A28"/>
+                </a:solidFill>
+                <a:latin typeface="Verdana" panose="020B0604030504040204"/>
+                <a:cs typeface="Verdana" panose="020B0604030504040204"/>
+              </a:rPr>
+              <a:t> </a:t>
+            </a:r>
+            <a:r>
+              <a:rPr sz="2400" spc="20" dirty="0">
+                <a:solidFill>
+                  <a:srgbClr val="EF5A28"/>
+                </a:solidFill>
+                <a:latin typeface="Verdana" panose="020B0604030504040204"/>
+                <a:cs typeface="Verdana" panose="020B0604030504040204"/>
+              </a:rPr>
+              <a:t>specified</a:t>
+            </a:r>
+            <a:r>
+              <a:rPr sz="2400" spc="-140" dirty="0">
+                <a:solidFill>
+                  <a:srgbClr val="EF5A28"/>
+                </a:solidFill>
+                <a:latin typeface="Verdana" panose="020B0604030504040204"/>
+                <a:cs typeface="Verdana" panose="020B0604030504040204"/>
+              </a:rPr>
+              <a:t> </a:t>
+            </a:r>
+            <a:r>
+              <a:rPr sz="2400" spc="-20" dirty="0">
+                <a:solidFill>
+                  <a:srgbClr val="EF5A28"/>
+                </a:solidFill>
+                <a:latin typeface="Verdana" panose="020B0604030504040204"/>
+                <a:cs typeface="Verdana" panose="020B0604030504040204"/>
+              </a:rPr>
+              <a:t>using</a:t>
+            </a:r>
+            <a:r>
+              <a:rPr sz="2400" spc="-130" dirty="0">
+                <a:solidFill>
+                  <a:srgbClr val="EF5A28"/>
+                </a:solidFill>
+                <a:latin typeface="Verdana" panose="020B0604030504040204"/>
+                <a:cs typeface="Verdana" panose="020B0604030504040204"/>
+              </a:rPr>
+              <a:t> </a:t>
+            </a:r>
+            <a:r>
+              <a:rPr sz="2400" spc="90" dirty="0">
+                <a:solidFill>
+                  <a:srgbClr val="EF5A28"/>
+                </a:solidFill>
+                <a:latin typeface="Verdana" panose="020B0604030504040204"/>
+                <a:cs typeface="Verdana" panose="020B0604030504040204"/>
+              </a:rPr>
+              <a:t>GROUP</a:t>
+            </a:r>
+            <a:r>
+              <a:rPr sz="2400" spc="-125" dirty="0">
+                <a:solidFill>
+                  <a:srgbClr val="EF5A28"/>
+                </a:solidFill>
+                <a:latin typeface="Verdana" panose="020B0604030504040204"/>
+                <a:cs typeface="Verdana" panose="020B0604030504040204"/>
+              </a:rPr>
+              <a:t> </a:t>
+            </a:r>
+            <a:r>
+              <a:rPr sz="2400" spc="125" dirty="0">
+                <a:solidFill>
+                  <a:srgbClr val="EF5A28"/>
+                </a:solidFill>
+                <a:latin typeface="Verdana" panose="020B0604030504040204"/>
+                <a:cs typeface="Verdana" panose="020B0604030504040204"/>
+              </a:rPr>
+              <a:t>BY</a:t>
+            </a:r>
+            <a:endParaRPr sz="2400">
+              <a:latin typeface="Verdana" panose="020B0604030504040204"/>
+              <a:cs typeface="Verdana" panose="020B0604030504040204"/>
+            </a:endParaRPr>
+          </a:p>
+          <a:p>
+            <a:pPr marL="12700">
+              <a:lnSpc>
+                <a:spcPct val="100000"/>
+              </a:lnSpc>
+              <a:spcBef>
+                <a:spcPts val="1800"/>
+              </a:spcBef>
+            </a:pPr>
+            <a:r>
+              <a:rPr sz="2400" spc="50" dirty="0">
+                <a:solidFill>
+                  <a:srgbClr val="EF5A28"/>
+                </a:solidFill>
+                <a:latin typeface="Verdana" panose="020B0604030504040204"/>
+                <a:cs typeface="Verdana" panose="020B0604030504040204"/>
+              </a:rPr>
+              <a:t>HAVING</a:t>
+            </a:r>
+            <a:r>
+              <a:rPr sz="2400" spc="-120" dirty="0">
+                <a:solidFill>
+                  <a:srgbClr val="EF5A28"/>
+                </a:solidFill>
+                <a:latin typeface="Verdana" panose="020B0604030504040204"/>
+                <a:cs typeface="Verdana" panose="020B0604030504040204"/>
+              </a:rPr>
+              <a:t> </a:t>
+            </a:r>
+            <a:r>
+              <a:rPr sz="2400" spc="10" dirty="0">
+                <a:solidFill>
+                  <a:srgbClr val="EF5A28"/>
+                </a:solidFill>
+                <a:latin typeface="Verdana" panose="020B0604030504040204"/>
+                <a:cs typeface="Verdana" panose="020B0604030504040204"/>
+              </a:rPr>
+              <a:t>filters</a:t>
+            </a:r>
+            <a:r>
+              <a:rPr sz="2400" spc="-114" dirty="0">
+                <a:solidFill>
+                  <a:srgbClr val="EF5A28"/>
+                </a:solidFill>
+                <a:latin typeface="Verdana" panose="020B0604030504040204"/>
+                <a:cs typeface="Verdana" panose="020B0604030504040204"/>
+              </a:rPr>
+              <a:t> </a:t>
+            </a:r>
+            <a:r>
+              <a:rPr sz="2400" spc="35" dirty="0">
+                <a:solidFill>
+                  <a:srgbClr val="EF5A28"/>
+                </a:solidFill>
+                <a:latin typeface="Verdana" panose="020B0604030504040204"/>
+                <a:cs typeface="Verdana" panose="020B0604030504040204"/>
+              </a:rPr>
+              <a:t>aggregate</a:t>
+            </a:r>
+            <a:r>
+              <a:rPr sz="2400" spc="-114" dirty="0">
+                <a:solidFill>
+                  <a:srgbClr val="EF5A28"/>
+                </a:solidFill>
+                <a:latin typeface="Verdana" panose="020B0604030504040204"/>
+                <a:cs typeface="Verdana" panose="020B0604030504040204"/>
+              </a:rPr>
+              <a:t> </a:t>
+            </a:r>
+            <a:r>
+              <a:rPr sz="2400" spc="-15" dirty="0">
+                <a:solidFill>
+                  <a:srgbClr val="EF5A28"/>
+                </a:solidFill>
+                <a:latin typeface="Verdana" panose="020B0604030504040204"/>
+                <a:cs typeface="Verdana" panose="020B0604030504040204"/>
+              </a:rPr>
+              <a:t>results</a:t>
+            </a:r>
+            <a:endParaRPr sz="2400">
+              <a:latin typeface="Verdana" panose="020B0604030504040204"/>
+              <a:cs typeface="Verdana" panose="020B0604030504040204"/>
+            </a:endParaRPr>
+          </a:p>
+        </p:txBody>
+      </p:sp>
+      <p:sp>
+        <p:nvSpPr>
+          <p:cNvPr id="4" name="object 4"/>
+          <p:cNvSpPr txBox="1">
+            <a:spLocks noGrp="1"/>
+          </p:cNvSpPr>
+          <p:nvPr>
+            <p:ph type="title"/>
+          </p:nvPr>
+        </p:nvSpPr>
+        <p:spPr>
+          <a:xfrm>
+            <a:off x="1226374" y="1916483"/>
+            <a:ext cx="2182495" cy="574040"/>
+          </a:xfrm>
+          <a:prstGeom prst="rect">
+            <a:avLst/>
+          </a:prstGeom>
+        </p:spPr>
+        <p:txBody>
+          <a:bodyPr vert="horz" wrap="square" lIns="0" tIns="12700" rIns="0" bIns="0" rtlCol="0">
+            <a:spAutoFit/>
+          </a:bodyPr>
+          <a:lstStyle/>
+          <a:p>
+            <a:pPr marL="12700">
+              <a:lnSpc>
+                <a:spcPct val="100000"/>
+              </a:lnSpc>
+              <a:spcBef>
+                <a:spcPts val="100"/>
+              </a:spcBef>
+            </a:pPr>
+            <a:r>
+              <a:rPr spc="-105" dirty="0"/>
+              <a:t>Sum</a:t>
+            </a:r>
+            <a:r>
+              <a:rPr spc="-80" dirty="0"/>
+              <a:t>m</a:t>
+            </a:r>
+            <a:r>
+              <a:rPr spc="-105" dirty="0"/>
+              <a:t>a</a:t>
+            </a:r>
+            <a:r>
+              <a:rPr spc="-55" dirty="0"/>
+              <a:t>ry</a:t>
+            </a:r>
+          </a:p>
+        </p:txBody>
+      </p:sp>
+      <p:sp>
+        <p:nvSpPr>
+          <p:cNvPr id="5" name="Slide Number Placeholder 4"/>
+          <p:cNvSpPr>
+            <a:spLocks noGrp="1"/>
+          </p:cNvSpPr>
+          <p:nvPr>
+            <p:ph type="sldNum" sz="quarter" idx="7"/>
+          </p:nvPr>
+        </p:nvSpPr>
+        <p:spPr/>
+        <p:txBody>
+          <a:bodyPr/>
+          <a:lstStyle/>
+          <a:p>
+            <a:fld id="{B6F15528-21DE-4FAA-801E-634DDDAF4B2B}" type="slidenum">
+              <a:rPr/>
+              <a:t>34</a:t>
             </a:fld>
             <a:endParaRPr/>
           </a:p>

--- a/Training Materials/8. PostgreSQL/1. Querying Data from PostgreSQL/Slides/6. Presenting and Aggregating Your Result/presenting-and-aggregating-your-results-slides.pptx
+++ b/Training Materials/8. PostgreSQL/1. Querying Data from PostgreSQL/Slides/6. Presenting and Aggregating Your Result/presenting-and-aggregating-your-results-slides.pptx
@@ -238,7 +238,7 @@
           <a:p>
             <a:fld id="{3EFD42F7-718C-4B98-AAEC-167E6DDD60A7}" type="datetimeFigureOut">
               <a:rPr lang="en-US" smtClean="0"/>
-              <a:t>1/6/2026</a:t>
+              <a:t>1/7/2026</a:t>
             </a:fld>
             <a:endParaRPr lang="en-US"/>
           </a:p>
@@ -673,7 +673,7 @@
           <a:p>
             <a:fld id="{1D8BD707-D9CF-40AE-B4C6-C98DA3205C09}" type="datetimeFigureOut">
               <a:rPr lang="en-US"/>
-              <a:t>1/6/2026</a:t>
+              <a:t>1/7/2026</a:t>
             </a:fld>
             <a:endParaRPr lang="en-US"/>
           </a:p>
@@ -850,7 +850,7 @@
           <a:p>
             <a:fld id="{1D8BD707-D9CF-40AE-B4C6-C98DA3205C09}" type="datetimeFigureOut">
               <a:rPr lang="en-US"/>
-              <a:t>1/6/2026</a:t>
+              <a:t>1/7/2026</a:t>
             </a:fld>
             <a:endParaRPr lang="en-US"/>
           </a:p>
@@ -1066,7 +1066,7 @@
           <a:p>
             <a:fld id="{1D8BD707-D9CF-40AE-B4C6-C98DA3205C09}" type="datetimeFigureOut">
               <a:rPr lang="en-US"/>
-              <a:t>1/6/2026</a:t>
+              <a:t>1/7/2026</a:t>
             </a:fld>
             <a:endParaRPr lang="en-US"/>
           </a:p>
@@ -1216,7 +1216,7 @@
           <a:p>
             <a:fld id="{1D8BD707-D9CF-40AE-B4C6-C98DA3205C09}" type="datetimeFigureOut">
               <a:rPr lang="en-US"/>
-              <a:t>1/6/2026</a:t>
+              <a:t>1/7/2026</a:t>
             </a:fld>
             <a:endParaRPr lang="en-US"/>
           </a:p>
@@ -1395,7 +1395,7 @@
           <a:p>
             <a:fld id="{1D8BD707-D9CF-40AE-B4C6-C98DA3205C09}" type="datetimeFigureOut">
               <a:rPr lang="en-US"/>
-              <a:t>1/6/2026</a:t>
+              <a:t>1/7/2026</a:t>
             </a:fld>
             <a:endParaRPr lang="en-US"/>
           </a:p>
@@ -1620,7 +1620,7 @@
           <a:p>
             <a:fld id="{1D8BD707-D9CF-40AE-B4C6-C98DA3205C09}" type="datetimeFigureOut">
               <a:rPr lang="en-US"/>
-              <a:t>1/6/2026</a:t>
+              <a:t>1/7/2026</a:t>
             </a:fld>
             <a:endParaRPr lang="en-US"/>
           </a:p>
@@ -21231,6 +21231,36 @@
           </a:p>
         </p:txBody>
       </p:sp>
+      <p:pic>
+        <p:nvPicPr>
+          <p:cNvPr id="4" name="Picture 3">
+            <a:extLst>
+              <a:ext uri="{FF2B5EF4-FFF2-40B4-BE49-F238E27FC236}">
+                <a16:creationId xmlns:a16="http://schemas.microsoft.com/office/drawing/2014/main" id="{F17E815B-A2CA-DE7C-7D17-EC786D674854}"/>
+              </a:ext>
+            </a:extLst>
+          </p:cNvPr>
+          <p:cNvPicPr>
+            <a:picLocks noChangeAspect="1"/>
+          </p:cNvPicPr>
+          <p:nvPr/>
+        </p:nvPicPr>
+        <p:blipFill>
+          <a:blip r:embed="rId2"/>
+          <a:stretch>
+            <a:fillRect/>
+          </a:stretch>
+        </p:blipFill>
+        <p:spPr>
+          <a:xfrm>
+            <a:off x="6066020" y="4755057"/>
+            <a:ext cx="6075862" cy="1419423"/>
+          </a:xfrm>
+          <a:prstGeom prst="rect">
+            <a:avLst/>
+          </a:prstGeom>
+        </p:spPr>
+      </p:pic>
     </p:spTree>
     <p:extLst>
       <p:ext uri="{BB962C8B-B14F-4D97-AF65-F5344CB8AC3E}">

--- a/Training Materials/8. PostgreSQL/1. Querying Data from PostgreSQL/Slides/6. Presenting and Aggregating Your Result/presenting-and-aggregating-your-results-slides.pptx
+++ b/Training Materials/8. PostgreSQL/1. Querying Data from PostgreSQL/Slides/6. Presenting and Aggregating Your Result/presenting-and-aggregating-your-results-slides.pptx
@@ -18011,7 +18011,7 @@
                 </a:solidFill>
                 <a:latin typeface="Verdana" panose="020B0604030504040204"/>
               </a:rPr>
-              <a:t>,</a:t>
+              <a:t>,…,</a:t>
             </a:r>
           </a:p>
           <a:p>
